--- a/AIA-Management-Presentazione.pptx
+++ b/AIA-Management-Presentazione.pptx
@@ -13,6 +13,7 @@
     <p:sldId id="261" r:id="rId7"/>
     <p:sldId id="262" r:id="rId8"/>
     <p:sldId id="263" r:id="rId9"/>
+    <p:sldId id="269" r:id="rId20"/>
     <p:sldId id="264" r:id="rId10"/>
     <p:sldId id="265" r:id="rId11"/>
     <p:sldId id="266" r:id="rId12"/>
@@ -2221,6 +2222,881 @@
 
 <file path=ppt/slides/slide10.xml><?xml version="1.0" encoding="utf-8"?>
 <p:sld xmlns:a="http://schemas.openxmlformats.org/drawingml/2006/main" xmlns:r="http://schemas.openxmlformats.org/officeDocument/2006/relationships" xmlns:p="http://schemas.openxmlformats.org/presentationml/2006/main">
+  <p:cSld name="Slide 9">
+    <p:bg>
+      <p:bgPr>
+        <a:solidFill>
+          <a:srgbClr val="FFFFFF"/>
+        </a:solidFill>
+      </p:bgPr>
+    </p:bg>
+    <p:spTree>
+      <p:nvGrpSpPr>
+        <p:cNvPr id="1" name=""/>
+        <p:cNvGrpSpPr/>
+        <p:nvPr/>
+      </p:nvGrpSpPr>
+      <p:grpSpPr>
+        <a:xfrm>
+          <a:off x="0" y="0"/>
+          <a:ext cx="0" cy="0"/>
+          <a:chOff x="0" y="0"/>
+          <a:chExt cx="0" cy="0"/>
+        </a:xfrm>
+      </p:grpSpPr>
+      <p:sp>
+        <p:nvSpPr>
+          <p:cNvPr id="2" name="Shape 0"/>
+          <p:cNvSpPr/>
+          <p:nvPr/>
+        </p:nvSpPr>
+        <p:spPr>
+          <a:xfrm>
+            <a:off x="0" y="0"/>
+            <a:ext cx="9144000" cy="1051560"/>
+          </a:xfrm>
+          <a:prstGeom prst="rect">
+            <a:avLst/>
+          </a:prstGeom>
+          <a:solidFill>
+            <a:srgbClr val="1B4332"/>
+          </a:solidFill>
+          <a:ln w="12700">
+            <a:solidFill>
+              <a:srgbClr val="1B4332"/>
+            </a:solidFill>
+            <a:prstDash val="solid"/>
+          </a:ln>
+        </p:spPr>
+      </p:sp>
+      <p:sp>
+        <p:nvSpPr>
+          <p:cNvPr id="3" name="Text 1"/>
+          <p:cNvSpPr/>
+          <p:nvPr/>
+        </p:nvSpPr>
+        <p:spPr>
+          <a:xfrm>
+            <a:off x="457200" y="0"/>
+            <a:ext cx="8229600" cy="658368"/>
+          </a:xfrm>
+          <a:prstGeom prst="rect">
+            <a:avLst/>
+          </a:prstGeom>
+          <a:noFill/>
+          <a:ln/>
+        </p:spPr>
+        <p:txBody>
+          <a:bodyPr wrap="square" lIns="0" tIns="0" rIns="0" bIns="0" rtlCol="0" anchor="b"/>
+          <a:lstStyle/>
+          <a:p>
+            <a:pPr indent="0" marL="0">
+              <a:buNone/>
+            </a:pPr>
+            <a:r>
+              <a:rPr lang="en-US" sz="2600" b="1" dirty="0">
+                <a:solidFill>
+                  <a:srgbClr val="FFFFFF"/>
+                </a:solidFill>
+                <a:latin typeface="Georgia" pitchFamily="34" charset="0"/>
+                <a:ea typeface="Georgia" pitchFamily="34" charset="-122"/>
+                <a:cs typeface="Georgia" pitchFamily="34" charset="-120"/>
+              </a:rPr>
+              <a:t>Modulo: Reportistica</a:t>
+            </a:r>
+            <a:endParaRPr lang="en-US" sz="2600" dirty="0"/>
+          </a:p>
+        </p:txBody>
+      </p:sp>
+      <p:sp>
+        <p:nvSpPr>
+          <p:cNvPr id="4" name="Text 2"/>
+          <p:cNvSpPr/>
+          <p:nvPr/>
+        </p:nvSpPr>
+        <p:spPr>
+          <a:xfrm>
+            <a:off x="457200" y="658368"/>
+            <a:ext cx="8229600" cy="393192"/>
+          </a:xfrm>
+          <a:prstGeom prst="rect">
+            <a:avLst/>
+          </a:prstGeom>
+          <a:noFill/>
+          <a:ln/>
+        </p:spPr>
+        <p:txBody>
+          <a:bodyPr wrap="square" lIns="0" tIns="0" rIns="0" bIns="0" rtlCol="0" anchor="t"/>
+          <a:lstStyle/>
+          <a:p>
+            <a:pPr indent="0" marL="0">
+              <a:buNone/>
+            </a:pPr>
+            <a:r>
+              <a:rPr lang="en-US" sz="1200" dirty="0">
+                <a:solidFill>
+                  <a:srgbClr val="95D5B2"/>
+                </a:solidFill>
+                <a:latin typeface="Calibri" pitchFamily="34" charset="0"/>
+                <a:ea typeface="Calibri" pitchFamily="34" charset="-122"/>
+                <a:cs typeface="Calibri" pitchFamily="34" charset="-120"/>
+              </a:rPr>
+              <a:t>Relazione annuale  •  Export  •  Comunicazioni</a:t>
+            </a:r>
+            <a:endParaRPr lang="en-US" sz="1200" dirty="0"/>
+          </a:p>
+        </p:txBody>
+      </p:sp>
+      <p:sp>
+        <p:nvSpPr>
+          <p:cNvPr id="5" name="Shape 3"/>
+          <p:cNvSpPr/>
+          <p:nvPr/>
+        </p:nvSpPr>
+        <p:spPr>
+          <a:xfrm>
+            <a:off x="365760" y="1143000"/>
+            <a:ext cx="5029200" cy="2148840"/>
+          </a:xfrm>
+          <a:prstGeom prst="rect">
+            <a:avLst/>
+          </a:prstGeom>
+          <a:solidFill>
+            <a:srgbClr val="D8F3DC"/>
+          </a:solidFill>
+          <a:ln w="12700">
+            <a:solidFill>
+              <a:srgbClr val="A5D6A7"/>
+            </a:solidFill>
+            <a:prstDash val="solid"/>
+          </a:ln>
+        </p:spPr>
+      </p:sp>
+      <p:sp>
+        <p:nvSpPr>
+          <p:cNvPr id="6" name="Text 4"/>
+          <p:cNvSpPr/>
+          <p:nvPr/>
+        </p:nvSpPr>
+        <p:spPr>
+          <a:xfrm>
+            <a:off x="548640" y="1234440"/>
+            <a:ext cx="4663440" cy="438912"/>
+          </a:xfrm>
+          <a:prstGeom prst="rect">
+            <a:avLst/>
+          </a:prstGeom>
+          <a:noFill/>
+          <a:ln/>
+        </p:spPr>
+        <p:txBody>
+          <a:bodyPr wrap="square" lIns="0" tIns="0" rIns="0" bIns="0" rtlCol="0" anchor="ctr"/>
+          <a:lstStyle/>
+          <a:p>
+            <a:pPr indent="0" marL="0">
+              <a:buNone/>
+            </a:pPr>
+            <a:r>
+              <a:rPr lang="en-US" sz="1600" b="1" dirty="0">
+                <a:solidFill>
+                  <a:srgbClr val="1B4332"/>
+                </a:solidFill>
+                <a:latin typeface="Georgia" pitchFamily="34" charset="0"/>
+                <a:ea typeface="Georgia" pitchFamily="34" charset="-122"/>
+                <a:cs typeface="Georgia" pitchFamily="34" charset="-120"/>
+              </a:rPr>
+              <a:t>📑  Relazione Annuale AIA</a:t>
+            </a:r>
+            <a:endParaRPr lang="en-US" sz="1600" dirty="0"/>
+          </a:p>
+        </p:txBody>
+      </p:sp>
+      <p:sp>
+        <p:nvSpPr>
+          <p:cNvPr id="7" name="Text 5"/>
+          <p:cNvSpPr/>
+          <p:nvPr/>
+        </p:nvSpPr>
+        <p:spPr>
+          <a:xfrm>
+            <a:off x="548640" y="1737360"/>
+            <a:ext cx="4663440" cy="1417320"/>
+          </a:xfrm>
+          <a:prstGeom prst="rect">
+            <a:avLst/>
+          </a:prstGeom>
+          <a:noFill/>
+          <a:ln/>
+        </p:spPr>
+        <p:txBody>
+          <a:bodyPr wrap="square" rtlCol="0" anchor="ctr"/>
+          <a:lstStyle/>
+          <a:p>
+            <a:pPr marL="342900" indent="-342900">
+              <a:buSzPct val="100000"/>
+              <a:buChar char="•"/>
+            </a:pPr>
+            <a:r>
+              <a:rPr lang="en-US" sz="1200" dirty="0">
+                <a:solidFill>
+                  <a:srgbClr val="1B2028"/>
+                </a:solidFill>
+                <a:latin typeface="Calibri" pitchFamily="34" charset="0"/>
+                <a:ea typeface="Calibri" pitchFamily="34" charset="-122"/>
+                <a:cs typeface="Calibri" pitchFamily="34" charset="-120"/>
+              </a:rPr>
+              <a:t>Generazione automatica del documento annuale</a:t>
+            </a:r>
+            <a:endParaRPr lang="en-US" sz="1200" dirty="0"/>
+          </a:p>
+          <a:p>
+            <a:pPr marL="342900" indent="-342900">
+              <a:buSzPct val="100000"/>
+              <a:buChar char="•"/>
+            </a:pPr>
+            <a:r>
+              <a:rPr lang="en-US" sz="1200" dirty="0">
+                <a:solidFill>
+                  <a:srgbClr val="1B2028"/>
+                </a:solidFill>
+                <a:latin typeface="Calibri" pitchFamily="34" charset="0"/>
+                <a:ea typeface="Calibri" pitchFamily="34" charset="-122"/>
+                <a:cs typeface="Calibri" pitchFamily="34" charset="-120"/>
+              </a:rPr>
+              <a:t>Raccoglie tutti i dati inseriti nell'anno: produzione, monitoraggi, rifiuti</a:t>
+            </a:r>
+            <a:endParaRPr lang="en-US" sz="1200" dirty="0"/>
+          </a:p>
+          <a:p>
+            <a:pPr marL="342900" indent="-342900">
+              <a:buSzPct val="100000"/>
+              <a:buChar char="•"/>
+            </a:pPr>
+            <a:r>
+              <a:rPr lang="en-US" sz="1200" dirty="0">
+                <a:solidFill>
+                  <a:srgbClr val="1B2028"/>
+                </a:solidFill>
+                <a:latin typeface="Calibri" pitchFamily="34" charset="0"/>
+                <a:ea typeface="Calibri" pitchFamily="34" charset="-122"/>
+                <a:cs typeface="Calibri" pitchFamily="34" charset="-120"/>
+              </a:rPr>
+              <a:t>Esportazione PDF con un clic dalla dashboard</a:t>
+            </a:r>
+            <a:endParaRPr lang="en-US" sz="1200" dirty="0"/>
+          </a:p>
+          <a:p>
+            <a:pPr marL="342900" indent="-342900">
+              <a:buSzPct val="100000"/>
+              <a:buChar char="•"/>
+            </a:pPr>
+            <a:r>
+              <a:rPr lang="en-US" sz="1200" dirty="0">
+                <a:solidFill>
+                  <a:srgbClr val="1B2028"/>
+                </a:solidFill>
+                <a:latin typeface="Calibri" pitchFamily="34" charset="0"/>
+                <a:ea typeface="Calibri" pitchFamily="34" charset="-122"/>
+                <a:cs typeface="Calibri" pitchFamily="34" charset="-120"/>
+              </a:rPr>
+              <a:t>Selezionabile per stabilimento e anno di riferimento</a:t>
+            </a:r>
+            <a:endParaRPr lang="en-US" sz="1200" dirty="0"/>
+          </a:p>
+        </p:txBody>
+      </p:sp>
+      <p:sp>
+        <p:nvSpPr>
+          <p:cNvPr id="8" name="Shape 6"/>
+          <p:cNvSpPr/>
+          <p:nvPr/>
+        </p:nvSpPr>
+        <p:spPr>
+          <a:xfrm>
+            <a:off x="365760" y="3429000"/>
+            <a:ext cx="5029200" cy="1508760"/>
+          </a:xfrm>
+          <a:prstGeom prst="rect">
+            <a:avLst/>
+          </a:prstGeom>
+          <a:solidFill>
+            <a:srgbClr val="FFFFFF"/>
+          </a:solidFill>
+          <a:ln w="12700">
+            <a:solidFill>
+              <a:srgbClr val="E8F5E9"/>
+            </a:solidFill>
+            <a:prstDash val="solid"/>
+          </a:ln>
+          <a:effectLst>
+            <a:outerShdw sx="100000" sy="100000" kx="0" ky="0" algn="bl" rotWithShape="0" blurRad="63500" dist="25400" dir="8100000">
+              <a:srgbClr val="000000">
+                <a:alpha val="10000"/>
+              </a:srgbClr>
+            </a:outerShdw>
+          </a:effectLst>
+        </p:spPr>
+      </p:sp>
+      <p:sp>
+        <p:nvSpPr>
+          <p:cNvPr id="9" name="Shape 7"/>
+          <p:cNvSpPr/>
+          <p:nvPr/>
+        </p:nvSpPr>
+        <p:spPr>
+          <a:xfrm>
+            <a:off x="365760" y="3429000"/>
+            <a:ext cx="54864" cy="1508760"/>
+          </a:xfrm>
+          <a:prstGeom prst="rect">
+            <a:avLst/>
+          </a:prstGeom>
+          <a:solidFill>
+            <a:srgbClr val="40916C"/>
+          </a:solidFill>
+          <a:ln w="12700">
+            <a:solidFill>
+              <a:srgbClr val="40916C"/>
+            </a:solidFill>
+            <a:prstDash val="solid"/>
+          </a:ln>
+        </p:spPr>
+      </p:sp>
+      <p:sp>
+        <p:nvSpPr>
+          <p:cNvPr id="10" name="Text 8"/>
+          <p:cNvSpPr/>
+          <p:nvPr/>
+        </p:nvSpPr>
+        <p:spPr>
+          <a:xfrm>
+            <a:off x="548640" y="3520440"/>
+            <a:ext cx="4663440" cy="384048"/>
+          </a:xfrm>
+          <a:prstGeom prst="rect">
+            <a:avLst/>
+          </a:prstGeom>
+          <a:noFill/>
+          <a:ln/>
+        </p:spPr>
+        <p:txBody>
+          <a:bodyPr wrap="square" lIns="0" tIns="0" rIns="0" bIns="0" rtlCol="0" anchor="ctr"/>
+          <a:lstStyle/>
+          <a:p>
+            <a:pPr indent="0" marL="0">
+              <a:buNone/>
+            </a:pPr>
+            <a:r>
+              <a:rPr lang="en-US" sz="1400" b="1" dirty="0">
+                <a:solidFill>
+                  <a:srgbClr val="1B4332"/>
+                </a:solidFill>
+                <a:latin typeface="Georgia" pitchFamily="34" charset="0"/>
+                <a:ea typeface="Georgia" pitchFamily="34" charset="-122"/>
+                <a:cs typeface="Georgia" pitchFamily="34" charset="-120"/>
+              </a:rPr>
+              <a:t>📬  Comunicazioni verso gli enti</a:t>
+            </a:r>
+            <a:endParaRPr lang="en-US" sz="1400" dirty="0"/>
+          </a:p>
+        </p:txBody>
+      </p:sp>
+      <p:sp>
+        <p:nvSpPr>
+          <p:cNvPr id="11" name="Text 9"/>
+          <p:cNvSpPr/>
+          <p:nvPr/>
+        </p:nvSpPr>
+        <p:spPr>
+          <a:xfrm>
+            <a:off x="548640" y="3950208"/>
+            <a:ext cx="4663440" cy="868680"/>
+          </a:xfrm>
+          <a:prstGeom prst="rect">
+            <a:avLst/>
+          </a:prstGeom>
+          <a:noFill/>
+          <a:ln/>
+        </p:spPr>
+        <p:txBody>
+          <a:bodyPr wrap="square" rtlCol="0" anchor="ctr"/>
+          <a:lstStyle/>
+          <a:p>
+            <a:pPr indent="0" marL="0">
+              <a:buNone/>
+            </a:pPr>
+            <a:r>
+              <a:rPr lang="en-US" sz="1200" dirty="0">
+                <a:solidFill>
+                  <a:srgbClr val="4A5568"/>
+                </a:solidFill>
+                <a:latin typeface="Calibri" pitchFamily="34" charset="0"/>
+                <a:ea typeface="Calibri" pitchFamily="34" charset="-122"/>
+                <a:cs typeface="Calibri" pitchFamily="34" charset="-120"/>
+              </a:rPr>
+              <a:t>Archiviazione di tutte le comunicazioni ufficiali verso ARPA, Provincia e Regione con data, oggetto e allegato. Storico completo per ogni stabilimento.</a:t>
+            </a:r>
+            <a:endParaRPr lang="en-US" sz="1200" dirty="0"/>
+          </a:p>
+        </p:txBody>
+      </p:sp>
+      <p:sp>
+        <p:nvSpPr>
+          <p:cNvPr id="12" name="Shape 10"/>
+          <p:cNvSpPr/>
+          <p:nvPr/>
+        </p:nvSpPr>
+        <p:spPr>
+          <a:xfrm>
+            <a:off x="5669280" y="1143000"/>
+            <a:ext cx="3017520" cy="1143000"/>
+          </a:xfrm>
+          <a:prstGeom prst="rect">
+            <a:avLst/>
+          </a:prstGeom>
+          <a:solidFill>
+            <a:srgbClr val="FFFFFF"/>
+          </a:solidFill>
+          <a:ln w="12700">
+            <a:solidFill>
+              <a:srgbClr val="E8F5E9"/>
+            </a:solidFill>
+            <a:prstDash val="solid"/>
+          </a:ln>
+          <a:effectLst>
+            <a:outerShdw sx="100000" sy="100000" kx="0" ky="0" algn="bl" rotWithShape="0" blurRad="63500" dist="25400" dir="8100000">
+              <a:srgbClr val="000000">
+                <a:alpha val="10000"/>
+              </a:srgbClr>
+            </a:outerShdw>
+          </a:effectLst>
+        </p:spPr>
+      </p:sp>
+      <p:sp>
+        <p:nvSpPr>
+          <p:cNvPr id="13" name="Shape 11"/>
+          <p:cNvSpPr/>
+          <p:nvPr/>
+        </p:nvSpPr>
+        <p:spPr>
+          <a:xfrm>
+            <a:off x="5669280" y="1143000"/>
+            <a:ext cx="54864" cy="1143000"/>
+          </a:xfrm>
+          <a:prstGeom prst="rect">
+            <a:avLst/>
+          </a:prstGeom>
+          <a:solidFill>
+            <a:srgbClr val="40916C"/>
+          </a:solidFill>
+          <a:ln w="12700">
+            <a:solidFill>
+              <a:srgbClr val="40916C"/>
+            </a:solidFill>
+            <a:prstDash val="solid"/>
+          </a:ln>
+        </p:spPr>
+      </p:sp>
+      <p:sp>
+        <p:nvSpPr>
+          <p:cNvPr id="14" name="Text 12"/>
+          <p:cNvSpPr/>
+          <p:nvPr/>
+        </p:nvSpPr>
+        <p:spPr>
+          <a:xfrm>
+            <a:off x="5760720" y="1143000"/>
+            <a:ext cx="548640" cy="1143000"/>
+          </a:xfrm>
+          <a:prstGeom prst="rect">
+            <a:avLst/>
+          </a:prstGeom>
+          <a:noFill/>
+          <a:ln/>
+        </p:spPr>
+        <p:txBody>
+          <a:bodyPr wrap="square" rtlCol="0" anchor="ctr"/>
+          <a:lstStyle/>
+          <a:p>
+            <a:pPr algn="ctr" indent="0" marL="0">
+              <a:buNone/>
+            </a:pPr>
+            <a:r>
+              <a:rPr lang="en-US" sz="2400" dirty="0">
+                <a:solidFill>
+                  <a:srgbClr val="000000"/>
+                </a:solidFill>
+              </a:rPr>
+              <a:t>📊</a:t>
+            </a:r>
+            <a:endParaRPr lang="en-US" sz="2400" dirty="0"/>
+          </a:p>
+        </p:txBody>
+      </p:sp>
+      <p:sp>
+        <p:nvSpPr>
+          <p:cNvPr id="15" name="Text 13"/>
+          <p:cNvSpPr/>
+          <p:nvPr/>
+        </p:nvSpPr>
+        <p:spPr>
+          <a:xfrm>
+            <a:off x="6355080" y="1280160"/>
+            <a:ext cx="2240280" cy="868680"/>
+          </a:xfrm>
+          <a:prstGeom prst="rect">
+            <a:avLst/>
+          </a:prstGeom>
+          <a:noFill/>
+          <a:ln/>
+        </p:spPr>
+        <p:txBody>
+          <a:bodyPr wrap="square" lIns="0" tIns="0" rIns="0" bIns="0" rtlCol="0" anchor="ctr"/>
+          <a:lstStyle/>
+          <a:p>
+            <a:pPr indent="0" marL="0">
+              <a:buNone/>
+            </a:pPr>
+            <a:r>
+              <a:rPr lang="en-US" sz="1300" b="1" dirty="0">
+                <a:solidFill>
+                  <a:srgbClr val="1B4332"/>
+                </a:solidFill>
+                <a:latin typeface="Calibri" pitchFamily="34" charset="0"/>
+                <a:ea typeface="Calibri" pitchFamily="34" charset="-122"/>
+                <a:cs typeface="Calibri" pitchFamily="34" charset="-120"/>
+              </a:rPr>
+              <a:t>Export Excel</a:t>
+            </a:r>
+            <a:endParaRPr lang="en-US" sz="1300" dirty="0"/>
+          </a:p>
+          <a:p>
+            <a:pPr indent="0" marL="0">
+              <a:buNone/>
+            </a:pPr>
+            <a:r>
+              <a:rPr lang="en-US" sz="1100" dirty="0">
+                <a:solidFill>
+                  <a:srgbClr val="4A5568"/>
+                </a:solidFill>
+                <a:latin typeface="Calibri" pitchFamily="34" charset="0"/>
+                <a:ea typeface="Calibri" pitchFamily="34" charset="-122"/>
+                <a:cs typeface="Calibri" pitchFamily="34" charset="-120"/>
+              </a:rPr>
+              <a:t>Export dati tabellari per prescrizioni, misure e scadenze in formato .xlsx.</a:t>
+            </a:r>
+            <a:endParaRPr lang="en-US" sz="1300" dirty="0"/>
+          </a:p>
+        </p:txBody>
+      </p:sp>
+      <p:sp>
+        <p:nvSpPr>
+          <p:cNvPr id="16" name="Shape 14"/>
+          <p:cNvSpPr/>
+          <p:nvPr/>
+        </p:nvSpPr>
+        <p:spPr>
+          <a:xfrm>
+            <a:off x="5669280" y="2441448"/>
+            <a:ext cx="3017520" cy="1143000"/>
+          </a:xfrm>
+          <a:prstGeom prst="rect">
+            <a:avLst/>
+          </a:prstGeom>
+          <a:solidFill>
+            <a:srgbClr val="FFFFFF"/>
+          </a:solidFill>
+          <a:ln w="12700">
+            <a:solidFill>
+              <a:srgbClr val="E8F5E9"/>
+            </a:solidFill>
+            <a:prstDash val="solid"/>
+          </a:ln>
+          <a:effectLst>
+            <a:outerShdw sx="100000" sy="100000" kx="0" ky="0" algn="bl" rotWithShape="0" blurRad="63500" dist="25400" dir="8100000">
+              <a:srgbClr val="000000">
+                <a:alpha val="10000"/>
+              </a:srgbClr>
+            </a:outerShdw>
+          </a:effectLst>
+        </p:spPr>
+      </p:sp>
+      <p:sp>
+        <p:nvSpPr>
+          <p:cNvPr id="17" name="Shape 15"/>
+          <p:cNvSpPr/>
+          <p:nvPr/>
+        </p:nvSpPr>
+        <p:spPr>
+          <a:xfrm>
+            <a:off x="5669280" y="2441448"/>
+            <a:ext cx="54864" cy="1143000"/>
+          </a:xfrm>
+          <a:prstGeom prst="rect">
+            <a:avLst/>
+          </a:prstGeom>
+          <a:solidFill>
+            <a:srgbClr val="40916C"/>
+          </a:solidFill>
+          <a:ln w="12700">
+            <a:solidFill>
+              <a:srgbClr val="40916C"/>
+            </a:solidFill>
+            <a:prstDash val="solid"/>
+          </a:ln>
+        </p:spPr>
+      </p:sp>
+      <p:sp>
+        <p:nvSpPr>
+          <p:cNvPr id="18" name="Text 16"/>
+          <p:cNvSpPr/>
+          <p:nvPr/>
+        </p:nvSpPr>
+        <p:spPr>
+          <a:xfrm>
+            <a:off x="5760720" y="2441448"/>
+            <a:ext cx="548640" cy="1143000"/>
+          </a:xfrm>
+          <a:prstGeom prst="rect">
+            <a:avLst/>
+          </a:prstGeom>
+          <a:noFill/>
+          <a:ln/>
+        </p:spPr>
+        <p:txBody>
+          <a:bodyPr wrap="square" rtlCol="0" anchor="ctr"/>
+          <a:lstStyle/>
+          <a:p>
+            <a:pPr algn="ctr" indent="0" marL="0">
+              <a:buNone/>
+            </a:pPr>
+            <a:r>
+              <a:rPr lang="en-US" sz="2400" dirty="0">
+                <a:solidFill>
+                  <a:srgbClr val="000000"/>
+                </a:solidFill>
+              </a:rPr>
+              <a:t>📥</a:t>
+            </a:r>
+            <a:endParaRPr lang="en-US" sz="2400" dirty="0"/>
+          </a:p>
+        </p:txBody>
+      </p:sp>
+      <p:sp>
+        <p:nvSpPr>
+          <p:cNvPr id="19" name="Text 17"/>
+          <p:cNvSpPr/>
+          <p:nvPr/>
+        </p:nvSpPr>
+        <p:spPr>
+          <a:xfrm>
+            <a:off x="6355080" y="2578608"/>
+            <a:ext cx="2240280" cy="868680"/>
+          </a:xfrm>
+          <a:prstGeom prst="rect">
+            <a:avLst/>
+          </a:prstGeom>
+          <a:noFill/>
+          <a:ln/>
+        </p:spPr>
+        <p:txBody>
+          <a:bodyPr wrap="square" lIns="0" tIns="0" rIns="0" bIns="0" rtlCol="0" anchor="ctr"/>
+          <a:lstStyle/>
+          <a:p>
+            <a:pPr indent="0" marL="0">
+              <a:buNone/>
+            </a:pPr>
+            <a:r>
+              <a:rPr lang="en-US" sz="1300" b="1" dirty="0">
+                <a:solidFill>
+                  <a:srgbClr val="1B4332"/>
+                </a:solidFill>
+                <a:latin typeface="Calibri" pitchFamily="34" charset="0"/>
+                <a:ea typeface="Calibri" pitchFamily="34" charset="-122"/>
+                <a:cs typeface="Calibri" pitchFamily="34" charset="-120"/>
+              </a:rPr>
+              <a:t>Download immediato</a:t>
+            </a:r>
+            <a:endParaRPr lang="en-US" sz="1300" dirty="0"/>
+          </a:p>
+          <a:p>
+            <a:pPr indent="0" marL="0">
+              <a:buNone/>
+            </a:pPr>
+            <a:r>
+              <a:rPr lang="en-US" sz="1100" dirty="0">
+                <a:solidFill>
+                  <a:srgbClr val="4A5568"/>
+                </a:solidFill>
+                <a:latin typeface="Calibri" pitchFamily="34" charset="0"/>
+                <a:ea typeface="Calibri" pitchFamily="34" charset="-122"/>
+                <a:cs typeface="Calibri" pitchFamily="34" charset="-120"/>
+              </a:rPr>
+              <a:t>Tutti i report disponibili per il download diretto senza attese.</a:t>
+            </a:r>
+            <a:endParaRPr lang="en-US" sz="1300" dirty="0"/>
+          </a:p>
+        </p:txBody>
+      </p:sp>
+      <p:sp>
+        <p:nvSpPr>
+          <p:cNvPr id="20" name="Shape 18"/>
+          <p:cNvSpPr/>
+          <p:nvPr/>
+        </p:nvSpPr>
+        <p:spPr>
+          <a:xfrm>
+            <a:off x="5669280" y="3739896"/>
+            <a:ext cx="3017520" cy="1143000"/>
+          </a:xfrm>
+          <a:prstGeom prst="rect">
+            <a:avLst/>
+          </a:prstGeom>
+          <a:solidFill>
+            <a:srgbClr val="FFFFFF"/>
+          </a:solidFill>
+          <a:ln w="12700">
+            <a:solidFill>
+              <a:srgbClr val="E8F5E9"/>
+            </a:solidFill>
+            <a:prstDash val="solid"/>
+          </a:ln>
+          <a:effectLst>
+            <a:outerShdw sx="100000" sy="100000" kx="0" ky="0" algn="bl" rotWithShape="0" blurRad="63500" dist="25400" dir="8100000">
+              <a:srgbClr val="000000">
+                <a:alpha val="10000"/>
+              </a:srgbClr>
+            </a:outerShdw>
+          </a:effectLst>
+        </p:spPr>
+      </p:sp>
+      <p:sp>
+        <p:nvSpPr>
+          <p:cNvPr id="21" name="Shape 19"/>
+          <p:cNvSpPr/>
+          <p:nvPr/>
+        </p:nvSpPr>
+        <p:spPr>
+          <a:xfrm>
+            <a:off x="5669280" y="3739896"/>
+            <a:ext cx="54864" cy="1143000"/>
+          </a:xfrm>
+          <a:prstGeom prst="rect">
+            <a:avLst/>
+          </a:prstGeom>
+          <a:solidFill>
+            <a:srgbClr val="40916C"/>
+          </a:solidFill>
+          <a:ln w="12700">
+            <a:solidFill>
+              <a:srgbClr val="40916C"/>
+            </a:solidFill>
+            <a:prstDash val="solid"/>
+          </a:ln>
+        </p:spPr>
+      </p:sp>
+      <p:sp>
+        <p:nvSpPr>
+          <p:cNvPr id="22" name="Text 20"/>
+          <p:cNvSpPr/>
+          <p:nvPr/>
+        </p:nvSpPr>
+        <p:spPr>
+          <a:xfrm>
+            <a:off x="5760720" y="3739896"/>
+            <a:ext cx="548640" cy="1143000"/>
+          </a:xfrm>
+          <a:prstGeom prst="rect">
+            <a:avLst/>
+          </a:prstGeom>
+          <a:noFill/>
+          <a:ln/>
+        </p:spPr>
+        <p:txBody>
+          <a:bodyPr wrap="square" rtlCol="0" anchor="ctr"/>
+          <a:lstStyle/>
+          <a:p>
+            <a:pPr algn="ctr" indent="0" marL="0">
+              <a:buNone/>
+            </a:pPr>
+            <a:r>
+              <a:rPr lang="en-US" sz="2400" dirty="0">
+                <a:solidFill>
+                  <a:srgbClr val="000000"/>
+                </a:solidFill>
+              </a:rPr>
+              <a:t>📋</a:t>
+            </a:r>
+            <a:endParaRPr lang="en-US" sz="2400" dirty="0"/>
+          </a:p>
+        </p:txBody>
+      </p:sp>
+      <p:sp>
+        <p:nvSpPr>
+          <p:cNvPr id="23" name="Text 21"/>
+          <p:cNvSpPr/>
+          <p:nvPr/>
+        </p:nvSpPr>
+        <p:spPr>
+          <a:xfrm>
+            <a:off x="6355080" y="3877056"/>
+            <a:ext cx="2240280" cy="868680"/>
+          </a:xfrm>
+          <a:prstGeom prst="rect">
+            <a:avLst/>
+          </a:prstGeom>
+          <a:noFill/>
+          <a:ln/>
+        </p:spPr>
+        <p:txBody>
+          <a:bodyPr wrap="square" lIns="0" tIns="0" rIns="0" bIns="0" rtlCol="0" anchor="ctr"/>
+          <a:lstStyle/>
+          <a:p>
+            <a:pPr indent="0" marL="0">
+              <a:buNone/>
+            </a:pPr>
+            <a:r>
+              <a:rPr lang="en-US" sz="1300" b="1" dirty="0">
+                <a:solidFill>
+                  <a:srgbClr val="1B4332"/>
+                </a:solidFill>
+                <a:latin typeface="Calibri" pitchFamily="34" charset="0"/>
+                <a:ea typeface="Calibri" pitchFamily="34" charset="-122"/>
+                <a:cs typeface="Calibri" pitchFamily="34" charset="-120"/>
+              </a:rPr>
+              <a:t>Storico completo</a:t>
+            </a:r>
+            <a:endParaRPr lang="en-US" sz="1300" dirty="0"/>
+          </a:p>
+          <a:p>
+            <a:pPr indent="0" marL="0">
+              <a:buNone/>
+            </a:pPr>
+            <a:r>
+              <a:rPr lang="en-US" sz="1100" dirty="0">
+                <a:solidFill>
+                  <a:srgbClr val="4A5568"/>
+                </a:solidFill>
+                <a:latin typeface="Calibri" pitchFamily="34" charset="0"/>
+                <a:ea typeface="Calibri" pitchFamily="34" charset="-122"/>
+                <a:cs typeface="Calibri" pitchFamily="34" charset="-120"/>
+              </a:rPr>
+              <a:t>Dati storici per anno e stabilimento sempre consultabili.</a:t>
+            </a:r>
+            <a:endParaRPr lang="en-US" sz="1300" dirty="0"/>
+          </a:p>
+        </p:txBody>
+      </p:sp>
+    </p:spTree>
+  </p:cSld>
+  <p:clrMapOvr>
+    <a:masterClrMapping/>
+  </p:clrMapOvr>
+</p:sld>
+</file>
+
+<file path=ppt/slides/slide11.xml><?xml version="1.0" encoding="utf-8"?>
+<p:sld xmlns:a="http://schemas.openxmlformats.org/drawingml/2006/main" xmlns:r="http://schemas.openxmlformats.org/officeDocument/2006/relationships" xmlns:p="http://schemas.openxmlformats.org/presentationml/2006/main">
   <p:cSld name="Slide 10">
     <p:bg>
       <p:bgPr>
@@ -2978,7 +3854,7 @@
 </p:sld>
 </file>
 
-<file path=ppt/slides/slide11.xml><?xml version="1.0" encoding="utf-8"?>
+<file path=ppt/slides/slide12.xml><?xml version="1.0" encoding="utf-8"?>
 <p:sld xmlns:a="http://schemas.openxmlformats.org/drawingml/2006/main" xmlns:r="http://schemas.openxmlformats.org/officeDocument/2006/relationships" xmlns:p="http://schemas.openxmlformats.org/presentationml/2006/main">
   <p:cSld name="Slide 11">
     <p:bg>
@@ -3113,8 +3989,8 @@
         </p:nvSpPr>
         <p:spPr>
           <a:xfrm>
-            <a:off x="365760" y="1188720"/>
-            <a:ext cx="3977640" cy="1691640"/>
+            <a:off x="365760" y="1170432"/>
+            <a:ext cx="3977640" cy="1371600"/>
           </a:xfrm>
           <a:prstGeom prst="rect">
             <a:avLst/>
@@ -3145,7 +4021,7 @@
         </p:nvSpPr>
         <p:spPr>
           <a:xfrm>
-            <a:off x="365760" y="1188720"/>
+            <a:off x="365760" y="1170432"/>
             <a:ext cx="3977640" cy="91440"/>
           </a:xfrm>
           <a:prstGeom prst="rect">
@@ -3170,7 +4046,7 @@
         </p:nvSpPr>
         <p:spPr>
           <a:xfrm>
-            <a:off x="502920" y="1353312"/>
+            <a:off x="502920" y="1289304"/>
             <a:ext cx="594360" cy="594360"/>
           </a:xfrm>
           <a:prstGeom prst="rect">
@@ -3206,7 +4082,7 @@
         </p:nvSpPr>
         <p:spPr>
           <a:xfrm>
-            <a:off x="1143000" y="1371600"/>
+            <a:off x="1143000" y="1307592"/>
             <a:ext cx="3063240" cy="475488"/>
           </a:xfrm>
           <a:prstGeom prst="rect">
@@ -3259,8 +4135,8 @@
         </p:nvSpPr>
         <p:spPr>
           <a:xfrm>
-            <a:off x="502920" y="1938528"/>
-            <a:ext cx="3703320" cy="822960"/>
+            <a:off x="502920" y="1856232"/>
+            <a:ext cx="3703320" cy="640080"/>
           </a:xfrm>
           <a:prstGeom prst="rect">
             <a:avLst/>
@@ -3298,8 +4174,8 @@
         </p:nvSpPr>
         <p:spPr>
           <a:xfrm>
-            <a:off x="4617720" y="1188720"/>
-            <a:ext cx="3977640" cy="1691640"/>
+            <a:off x="4617720" y="1170432"/>
+            <a:ext cx="3977640" cy="1371600"/>
           </a:xfrm>
           <a:prstGeom prst="rect">
             <a:avLst/>
@@ -3330,7 +4206,7 @@
         </p:nvSpPr>
         <p:spPr>
           <a:xfrm>
-            <a:off x="4617720" y="1188720"/>
+            <a:off x="4617720" y="1170432"/>
             <a:ext cx="3977640" cy="91440"/>
           </a:xfrm>
           <a:prstGeom prst="rect">
@@ -3355,7 +4231,7 @@
         </p:nvSpPr>
         <p:spPr>
           <a:xfrm>
-            <a:off x="4754880" y="1353312"/>
+            <a:off x="4754880" y="1289304"/>
             <a:ext cx="594360" cy="594360"/>
           </a:xfrm>
           <a:prstGeom prst="rect">
@@ -3391,7 +4267,7 @@
         </p:nvSpPr>
         <p:spPr>
           <a:xfrm>
-            <a:off x="5394960" y="1371600"/>
+            <a:off x="5394960" y="1307592"/>
             <a:ext cx="3063240" cy="475488"/>
           </a:xfrm>
           <a:prstGeom prst="rect">
@@ -3444,8 +4320,8 @@
         </p:nvSpPr>
         <p:spPr>
           <a:xfrm>
-            <a:off x="4754880" y="1938528"/>
-            <a:ext cx="3703320" cy="822960"/>
+            <a:off x="4754880" y="1856232"/>
+            <a:ext cx="3703320" cy="640080"/>
           </a:xfrm>
           <a:prstGeom prst="rect">
             <a:avLst/>
@@ -3483,8 +4359,8 @@
         </p:nvSpPr>
         <p:spPr>
           <a:xfrm>
-            <a:off x="365760" y="3063240"/>
-            <a:ext cx="3977640" cy="1691640"/>
+            <a:off x="365760" y="2679192"/>
+            <a:ext cx="3977640" cy="1371600"/>
           </a:xfrm>
           <a:prstGeom prst="rect">
             <a:avLst/>
@@ -3515,7 +4391,7 @@
         </p:nvSpPr>
         <p:spPr>
           <a:xfrm>
-            <a:off x="365760" y="3063240"/>
+            <a:off x="365760" y="2679192"/>
             <a:ext cx="3977640" cy="91440"/>
           </a:xfrm>
           <a:prstGeom prst="rect">
@@ -3540,7 +4416,7 @@
         </p:nvSpPr>
         <p:spPr>
           <a:xfrm>
-            <a:off x="502920" y="3227832"/>
+            <a:off x="502920" y="2798064"/>
             <a:ext cx="594360" cy="594360"/>
           </a:xfrm>
           <a:prstGeom prst="rect">
@@ -3576,7 +4452,7 @@
         </p:nvSpPr>
         <p:spPr>
           <a:xfrm>
-            <a:off x="1143000" y="3246120"/>
+            <a:off x="1143000" y="2816352"/>
             <a:ext cx="3063240" cy="475488"/>
           </a:xfrm>
           <a:prstGeom prst="rect">
@@ -3629,8 +4505,8 @@
         </p:nvSpPr>
         <p:spPr>
           <a:xfrm>
-            <a:off x="502920" y="3813048"/>
-            <a:ext cx="3703320" cy="822960"/>
+            <a:off x="502920" y="3364992"/>
+            <a:ext cx="3703320" cy="640080"/>
           </a:xfrm>
           <a:prstGeom prst="rect">
             <a:avLst/>
@@ -3668,8 +4544,8 @@
         </p:nvSpPr>
         <p:spPr>
           <a:xfrm>
-            <a:off x="4617720" y="3063240"/>
-            <a:ext cx="3977640" cy="1691640"/>
+            <a:off x="4617720" y="2679192"/>
+            <a:ext cx="3977640" cy="1371600"/>
           </a:xfrm>
           <a:prstGeom prst="rect">
             <a:avLst/>
@@ -3700,7 +4576,7 @@
         </p:nvSpPr>
         <p:spPr>
           <a:xfrm>
-            <a:off x="4617720" y="3063240"/>
+            <a:off x="4617720" y="2679192"/>
             <a:ext cx="3977640" cy="91440"/>
           </a:xfrm>
           <a:prstGeom prst="rect">
@@ -3725,7 +4601,7 @@
         </p:nvSpPr>
         <p:spPr>
           <a:xfrm>
-            <a:off x="4754880" y="3227832"/>
+            <a:off x="4754880" y="2798064"/>
             <a:ext cx="594360" cy="594360"/>
           </a:xfrm>
           <a:prstGeom prst="rect">
@@ -3761,7 +4637,7 @@
         </p:nvSpPr>
         <p:spPr>
           <a:xfrm>
-            <a:off x="5394960" y="3246120"/>
+            <a:off x="5394960" y="2816352"/>
             <a:ext cx="3063240" cy="475488"/>
           </a:xfrm>
           <a:prstGeom prst="rect">
@@ -3814,8 +4690,8 @@
         </p:nvSpPr>
         <p:spPr>
           <a:xfrm>
-            <a:off x="4754880" y="3813048"/>
-            <a:ext cx="3703320" cy="822960"/>
+            <a:off x="4754880" y="3364992"/>
+            <a:ext cx="3703320" cy="640080"/>
           </a:xfrm>
           <a:prstGeom prst="rect">
             <a:avLst/>
@@ -3840,6 +4716,191 @@
                 <a:cs typeface="Calibri" pitchFamily="34" charset="-120"/>
               </a:rPr>
               <a:t>Container orchestration con docker-compose. Deploy ripetibile su qualsiasi server Linux.</a:t>
+            </a:r>
+            <a:endParaRPr lang="en-US" sz="1200" dirty="0"/>
+          </a:p>
+        </p:txBody>
+      </p:sp>
+      <p:sp>
+        <p:nvSpPr>
+          <p:cNvPr id="25" name="Shape 3"/>
+          <p:cNvSpPr/>
+          <p:nvPr/>
+        </p:nvSpPr>
+        <p:spPr>
+          <a:xfrm>
+            <a:off x="365760" y="4206240"/>
+            <a:ext cx="8229600" cy="777240"/>
+          </a:xfrm>
+          <a:prstGeom prst="rect">
+            <a:avLst/>
+          </a:prstGeom>
+          <a:solidFill>
+            <a:srgbClr val="FFFFFF"/>
+          </a:solidFill>
+          <a:ln w="12700">
+            <a:solidFill>
+              <a:srgbClr val="E8F5E9"/>
+            </a:solidFill>
+            <a:prstDash val="solid"/>
+          </a:ln>
+          <a:effectLst>
+            <a:outerShdw sx="100000" sy="100000" kx="0" ky="0" algn="bl" rotWithShape="0" blurRad="63500" dist="25400" dir="8100000">
+              <a:srgbClr val="000000">
+                <a:alpha val="10000"/>
+              </a:srgbClr>
+            </a:outerShdw>
+          </a:effectLst>
+        </p:spPr>
+      </p:sp>
+      <p:sp>
+        <p:nvSpPr>
+          <p:cNvPr id="26" name="Shape 4"/>
+          <p:cNvSpPr/>
+          <p:nvPr/>
+        </p:nvSpPr>
+        <p:spPr>
+          <a:xfrm>
+            <a:off x="365760" y="4206240"/>
+            <a:ext cx="8229600" cy="91440"/>
+          </a:xfrm>
+          <a:prstGeom prst="rect">
+            <a:avLst/>
+          </a:prstGeom>
+          <a:solidFill>
+            <a:srgbClr val="40916C"/>
+          </a:solidFill>
+          <a:ln w="12700">
+            <a:solidFill>
+              <a:srgbClr val="40916C"/>
+            </a:solidFill>
+            <a:prstDash val="solid"/>
+          </a:ln>
+        </p:spPr>
+      </p:sp>
+      <p:sp>
+        <p:nvSpPr>
+          <p:cNvPr id="27" name="Text 5"/>
+          <p:cNvSpPr/>
+          <p:nvPr/>
+        </p:nvSpPr>
+        <p:spPr>
+          <a:xfrm>
+            <a:off x="502920" y="4315968"/>
+            <a:ext cx="594360" cy="594360"/>
+          </a:xfrm>
+          <a:prstGeom prst="rect">
+            <a:avLst/>
+          </a:prstGeom>
+          <a:noFill/>
+          <a:ln/>
+        </p:spPr>
+        <p:txBody>
+          <a:bodyPr wrap="square" rtlCol="0" anchor="ctr"/>
+          <a:lstStyle/>
+          <a:p>
+            <a:pPr algn="ctr" indent="0" marL="0">
+              <a:buNone/>
+            </a:pPr>
+            <a:r>
+              <a:rPr lang="en-US" sz="2400" dirty="0">
+                <a:solidFill>
+                  <a:srgbClr val="000000"/>
+                </a:solidFill>
+              </a:rPr>
+              <a:t>🧠</a:t>
+            </a:r>
+            <a:endParaRPr lang="en-US" sz="2800" dirty="0"/>
+          </a:p>
+        </p:txBody>
+      </p:sp>
+      <p:sp>
+        <p:nvSpPr>
+          <p:cNvPr id="28" name="Text 6"/>
+          <p:cNvSpPr/>
+          <p:nvPr/>
+        </p:nvSpPr>
+        <p:spPr>
+          <a:xfrm>
+            <a:off x="1143000" y="4297680"/>
+            <a:ext cx="2651760" cy="594360"/>
+          </a:xfrm>
+          <a:prstGeom prst="rect">
+            <a:avLst/>
+          </a:prstGeom>
+          <a:noFill/>
+          <a:ln/>
+        </p:spPr>
+        <p:txBody>
+          <a:bodyPr wrap="square" lIns="0" tIns="0" rIns="0" bIns="0" rtlCol="0" anchor="ctr"/>
+          <a:lstStyle/>
+          <a:p>
+            <a:pPr indent="0" marL="0">
+              <a:buNone/>
+            </a:pPr>
+            <a:r>
+              <a:rPr lang="en-US" sz="1100" dirty="0">
+                <a:solidFill>
+                  <a:srgbClr val="4A5568"/>
+                </a:solidFill>
+                <a:latin typeface="Georgia" pitchFamily="34" charset="0"/>
+                <a:ea typeface="Georgia" pitchFamily="34" charset="-122"/>
+                <a:cs typeface="Georgia" pitchFamily="34" charset="-120"/>
+              </a:rPr>
+              <a:t>Modulo AI   </a:t>
+            </a:r>
+            <a:pPr indent="0" marL="0">
+              <a:buNone/>
+            </a:pPr>
+            <a:r>
+              <a:rPr lang="en-US" sz="1500" b="1" dirty="0">
+                <a:solidFill>
+                  <a:srgbClr val="40916C"/>
+                </a:solidFill>
+                <a:latin typeface="Georgia" pitchFamily="34" charset="0"/>
+                <a:ea typeface="Georgia" pitchFamily="34" charset="-122"/>
+                <a:cs typeface="Georgia" pitchFamily="34" charset="-120"/>
+              </a:rPr>
+              <a:t>AI generativa</a:t>
+            </a:r>
+            <a:endParaRPr lang="en-US" sz="1100" dirty="0"/>
+          </a:p>
+        </p:txBody>
+      </p:sp>
+      <p:sp>
+        <p:nvSpPr>
+          <p:cNvPr id="29" name="Text 7"/>
+          <p:cNvSpPr/>
+          <p:nvPr/>
+        </p:nvSpPr>
+        <p:spPr>
+          <a:xfrm>
+            <a:off x="3931920" y="4297680"/>
+            <a:ext cx="4572000" cy="594360"/>
+          </a:xfrm>
+          <a:prstGeom prst="rect">
+            <a:avLst/>
+          </a:prstGeom>
+          <a:noFill/>
+          <a:ln/>
+        </p:spPr>
+        <p:txBody>
+          <a:bodyPr wrap="square" lIns="0" tIns="0" rIns="0" bIns="0" rtlCol="0" anchor="ctr"/>
+          <a:lstStyle/>
+          <a:p>
+            <a:pPr indent="0" marL="0">
+              <a:buNone/>
+            </a:pPr>
+            <a:r>
+              <a:rPr lang="en-US" sz="1100" dirty="0">
+                <a:solidFill>
+                  <a:srgbClr val="4A5568"/>
+                </a:solidFill>
+                <a:latin typeface="Calibri" pitchFamily="34" charset="0"/>
+                <a:ea typeface="Calibri" pitchFamily="34" charset="-122"/>
+                <a:cs typeface="Calibri" pitchFamily="34" charset="-120"/>
+              </a:rPr>
+              <a:t>Base di conoscenza vettoriale nel database aziendale, embeddings locali, risposte con fonti verificabili</a:t>
             </a:r>
             <a:endParaRPr lang="en-US" sz="1200" dirty="0"/>
           </a:p>
@@ -3853,7 +4914,7 @@
 </p:sld>
 </file>
 
-<file path=ppt/slides/slide12.xml><?xml version="1.0" encoding="utf-8"?>
+<file path=ppt/slides/slide13.xml><?xml version="1.0" encoding="utf-8"?>
 <p:sld xmlns:a="http://schemas.openxmlformats.org/drawingml/2006/main" xmlns:r="http://schemas.openxmlformats.org/officeDocument/2006/relationships" xmlns:p="http://schemas.openxmlformats.org/presentationml/2006/main">
   <p:cSld name="Slide 12">
     <p:bg>
@@ -3963,8 +5024,8 @@
         </p:nvSpPr>
         <p:spPr>
           <a:xfrm>
-            <a:off x="320040" y="1371600"/>
-            <a:ext cx="1325880" cy="1600200"/>
+            <a:off x="329184" y="1371600"/>
+            <a:ext cx="1133856" cy="1600200"/>
           </a:xfrm>
           <a:prstGeom prst="rect">
             <a:avLst/>
@@ -3988,8 +5049,8 @@
         </p:nvSpPr>
         <p:spPr>
           <a:xfrm>
-            <a:off x="320040" y="1554480"/>
-            <a:ext cx="1325880" cy="621792"/>
+            <a:off x="329184" y="1554480"/>
+            <a:ext cx="1133856" cy="621792"/>
           </a:xfrm>
           <a:prstGeom prst="rect">
             <a:avLst/>
@@ -4024,8 +5085,8 @@
         </p:nvSpPr>
         <p:spPr>
           <a:xfrm>
-            <a:off x="320040" y="2267712"/>
-            <a:ext cx="1325880" cy="457200"/>
+            <a:off x="329184" y="2267712"/>
+            <a:ext cx="1133856" cy="457200"/>
           </a:xfrm>
           <a:prstGeom prst="rect">
             <a:avLst/>
@@ -4063,8 +5124,8 @@
         </p:nvSpPr>
         <p:spPr>
           <a:xfrm>
-            <a:off x="1755648" y="1371600"/>
-            <a:ext cx="1325880" cy="1600200"/>
+            <a:off x="1554480" y="1371600"/>
+            <a:ext cx="1133856" cy="1600200"/>
           </a:xfrm>
           <a:prstGeom prst="rect">
             <a:avLst/>
@@ -4088,8 +5149,8 @@
         </p:nvSpPr>
         <p:spPr>
           <a:xfrm>
-            <a:off x="1755648" y="1554480"/>
-            <a:ext cx="1325880" cy="621792"/>
+            <a:off x="1554480" y="1554480"/>
+            <a:ext cx="1133856" cy="621792"/>
           </a:xfrm>
           <a:prstGeom prst="rect">
             <a:avLst/>
@@ -4124,8 +5185,8 @@
         </p:nvSpPr>
         <p:spPr>
           <a:xfrm>
-            <a:off x="1755648" y="2267712"/>
-            <a:ext cx="1325880" cy="457200"/>
+            <a:off x="1554480" y="2267712"/>
+            <a:ext cx="1133856" cy="457200"/>
           </a:xfrm>
           <a:prstGeom prst="rect">
             <a:avLst/>
@@ -4163,8 +5224,8 @@
         </p:nvSpPr>
         <p:spPr>
           <a:xfrm>
-            <a:off x="3191256" y="1371600"/>
-            <a:ext cx="1325880" cy="1600200"/>
+            <a:off x="2779776" y="1371600"/>
+            <a:ext cx="1133856" cy="1600200"/>
           </a:xfrm>
           <a:prstGeom prst="rect">
             <a:avLst/>
@@ -4188,8 +5249,8 @@
         </p:nvSpPr>
         <p:spPr>
           <a:xfrm>
-            <a:off x="3191256" y="1554480"/>
-            <a:ext cx="1325880" cy="621792"/>
+            <a:off x="2779776" y="1554480"/>
+            <a:ext cx="1133856" cy="621792"/>
           </a:xfrm>
           <a:prstGeom prst="rect">
             <a:avLst/>
@@ -4224,8 +5285,8 @@
         </p:nvSpPr>
         <p:spPr>
           <a:xfrm>
-            <a:off x="3191256" y="2267712"/>
-            <a:ext cx="1325880" cy="457200"/>
+            <a:off x="2779776" y="2267712"/>
+            <a:ext cx="1133856" cy="457200"/>
           </a:xfrm>
           <a:prstGeom prst="rect">
             <a:avLst/>
@@ -4263,8 +5324,8 @@
         </p:nvSpPr>
         <p:spPr>
           <a:xfrm>
-            <a:off x="4626864" y="1371600"/>
-            <a:ext cx="1325880" cy="1600200"/>
+            <a:off x="4005072" y="1371600"/>
+            <a:ext cx="1133856" cy="1600200"/>
           </a:xfrm>
           <a:prstGeom prst="rect">
             <a:avLst/>
@@ -4288,8 +5349,8 @@
         </p:nvSpPr>
         <p:spPr>
           <a:xfrm>
-            <a:off x="4626864" y="1554480"/>
-            <a:ext cx="1325880" cy="621792"/>
+            <a:off x="4005072" y="1554480"/>
+            <a:ext cx="1133856" cy="621792"/>
           </a:xfrm>
           <a:prstGeom prst="rect">
             <a:avLst/>
@@ -4324,8 +5385,8 @@
         </p:nvSpPr>
         <p:spPr>
           <a:xfrm>
-            <a:off x="4626864" y="2267712"/>
-            <a:ext cx="1325880" cy="457200"/>
+            <a:off x="4005072" y="2267712"/>
+            <a:ext cx="1133856" cy="457200"/>
           </a:xfrm>
           <a:prstGeom prst="rect">
             <a:avLst/>
@@ -4363,8 +5424,8 @@
         </p:nvSpPr>
         <p:spPr>
           <a:xfrm>
-            <a:off x="6062472" y="1371600"/>
-            <a:ext cx="1325880" cy="1600200"/>
+            <a:off x="5230368" y="1371600"/>
+            <a:ext cx="1133856" cy="1600200"/>
           </a:xfrm>
           <a:prstGeom prst="rect">
             <a:avLst/>
@@ -4388,8 +5449,8 @@
         </p:nvSpPr>
         <p:spPr>
           <a:xfrm>
-            <a:off x="6062472" y="1554480"/>
-            <a:ext cx="1325880" cy="621792"/>
+            <a:off x="5230368" y="1554480"/>
+            <a:ext cx="1133856" cy="621792"/>
           </a:xfrm>
           <a:prstGeom prst="rect">
             <a:avLst/>
@@ -4424,8 +5485,8 @@
         </p:nvSpPr>
         <p:spPr>
           <a:xfrm>
-            <a:off x="6062472" y="2267712"/>
-            <a:ext cx="1325880" cy="457200"/>
+            <a:off x="5230368" y="2267712"/>
+            <a:ext cx="1133856" cy="457200"/>
           </a:xfrm>
           <a:prstGeom prst="rect">
             <a:avLst/>
@@ -4463,8 +5524,8 @@
         </p:nvSpPr>
         <p:spPr>
           <a:xfrm>
-            <a:off x="7498080" y="1371600"/>
-            <a:ext cx="1325880" cy="1600200"/>
+            <a:off x="6455664" y="1371600"/>
+            <a:ext cx="1133856" cy="1600200"/>
           </a:xfrm>
           <a:prstGeom prst="rect">
             <a:avLst/>
@@ -4488,8 +5549,8 @@
         </p:nvSpPr>
         <p:spPr>
           <a:xfrm>
-            <a:off x="7498080" y="1554480"/>
-            <a:ext cx="1325880" cy="621792"/>
+            <a:off x="6455664" y="1554480"/>
+            <a:ext cx="1133856" cy="621792"/>
           </a:xfrm>
           <a:prstGeom prst="rect">
             <a:avLst/>
@@ -4524,8 +5585,8 @@
         </p:nvSpPr>
         <p:spPr>
           <a:xfrm>
-            <a:off x="7498080" y="2267712"/>
-            <a:ext cx="1325880" cy="457200"/>
+            <a:off x="6455664" y="2267712"/>
+            <a:ext cx="1133856" cy="457200"/>
           </a:xfrm>
           <a:prstGeom prst="rect">
             <a:avLst/>
@@ -4563,8 +5624,8 @@
         </p:nvSpPr>
         <p:spPr>
           <a:xfrm>
-            <a:off x="320040" y="3200400"/>
-            <a:ext cx="1325880" cy="1600200"/>
+            <a:off x="7680960" y="1371600"/>
+            <a:ext cx="1133856" cy="1600200"/>
           </a:xfrm>
           <a:prstGeom prst="rect">
             <a:avLst/>
@@ -4588,8 +5649,8 @@
         </p:nvSpPr>
         <p:spPr>
           <a:xfrm>
-            <a:off x="320040" y="3383280"/>
-            <a:ext cx="1325880" cy="621792"/>
+            <a:off x="7680960" y="1554480"/>
+            <a:ext cx="1133856" cy="621792"/>
           </a:xfrm>
           <a:prstGeom prst="rect">
             <a:avLst/>
@@ -4624,8 +5685,8 @@
         </p:nvSpPr>
         <p:spPr>
           <a:xfrm>
-            <a:off x="320040" y="4096512"/>
-            <a:ext cx="1325880" cy="457200"/>
+            <a:off x="7680960" y="2267712"/>
+            <a:ext cx="1133856" cy="457200"/>
           </a:xfrm>
           <a:prstGeom prst="rect">
             <a:avLst/>
@@ -4663,8 +5724,8 @@
         </p:nvSpPr>
         <p:spPr>
           <a:xfrm>
-            <a:off x="1755648" y="3200400"/>
-            <a:ext cx="1325880" cy="1600200"/>
+            <a:off x="941832" y="3200400"/>
+            <a:ext cx="1133856" cy="1600200"/>
           </a:xfrm>
           <a:prstGeom prst="rect">
             <a:avLst/>
@@ -4688,8 +5749,8 @@
         </p:nvSpPr>
         <p:spPr>
           <a:xfrm>
-            <a:off x="1755648" y="3383280"/>
-            <a:ext cx="1325880" cy="621792"/>
+            <a:off x="941832" y="3383280"/>
+            <a:ext cx="1133856" cy="621792"/>
           </a:xfrm>
           <a:prstGeom prst="rect">
             <a:avLst/>
@@ -4724,8 +5785,8 @@
         </p:nvSpPr>
         <p:spPr>
           <a:xfrm>
-            <a:off x="1755648" y="4096512"/>
-            <a:ext cx="1325880" cy="457200"/>
+            <a:off x="941832" y="4096512"/>
+            <a:ext cx="1133856" cy="457200"/>
           </a:xfrm>
           <a:prstGeom prst="rect">
             <a:avLst/>
@@ -4763,8 +5824,8 @@
         </p:nvSpPr>
         <p:spPr>
           <a:xfrm>
-            <a:off x="3191256" y="3200400"/>
-            <a:ext cx="1325880" cy="1600200"/>
+            <a:off x="2167128" y="3200400"/>
+            <a:ext cx="1133856" cy="1600200"/>
           </a:xfrm>
           <a:prstGeom prst="rect">
             <a:avLst/>
@@ -4788,8 +5849,8 @@
         </p:nvSpPr>
         <p:spPr>
           <a:xfrm>
-            <a:off x="3191256" y="3383280"/>
-            <a:ext cx="1325880" cy="621792"/>
+            <a:off x="2167128" y="3383280"/>
+            <a:ext cx="1133856" cy="621792"/>
           </a:xfrm>
           <a:prstGeom prst="rect">
             <a:avLst/>
@@ -4824,8 +5885,8 @@
         </p:nvSpPr>
         <p:spPr>
           <a:xfrm>
-            <a:off x="3191256" y="4096512"/>
-            <a:ext cx="1325880" cy="457200"/>
+            <a:off x="2167128" y="4096512"/>
+            <a:ext cx="1133856" cy="457200"/>
           </a:xfrm>
           <a:prstGeom prst="rect">
             <a:avLst/>
@@ -4863,8 +5924,8 @@
         </p:nvSpPr>
         <p:spPr>
           <a:xfrm>
-            <a:off x="4626864" y="3200400"/>
-            <a:ext cx="1325880" cy="1600200"/>
+            <a:off x="3392424" y="3200400"/>
+            <a:ext cx="1133856" cy="1600200"/>
           </a:xfrm>
           <a:prstGeom prst="rect">
             <a:avLst/>
@@ -4888,8 +5949,8 @@
         </p:nvSpPr>
         <p:spPr>
           <a:xfrm>
-            <a:off x="4626864" y="3383280"/>
-            <a:ext cx="1325880" cy="621792"/>
+            <a:off x="3392424" y="3383280"/>
+            <a:ext cx="1133856" cy="621792"/>
           </a:xfrm>
           <a:prstGeom prst="rect">
             <a:avLst/>
@@ -4924,8 +5985,8 @@
         </p:nvSpPr>
         <p:spPr>
           <a:xfrm>
-            <a:off x="4626864" y="4096512"/>
-            <a:ext cx="1325880" cy="457200"/>
+            <a:off x="3392424" y="4096512"/>
+            <a:ext cx="1133856" cy="457200"/>
           </a:xfrm>
           <a:prstGeom prst="rect">
             <a:avLst/>
@@ -4963,8 +6024,8 @@
         </p:nvSpPr>
         <p:spPr>
           <a:xfrm>
-            <a:off x="6062472" y="3200400"/>
-            <a:ext cx="1325880" cy="1600200"/>
+            <a:off x="5843016" y="3200400"/>
+            <a:ext cx="1133856" cy="1600200"/>
           </a:xfrm>
           <a:prstGeom prst="rect">
             <a:avLst/>
@@ -4988,8 +6049,8 @@
         </p:nvSpPr>
         <p:spPr>
           <a:xfrm>
-            <a:off x="6062472" y="3383280"/>
-            <a:ext cx="1325880" cy="621792"/>
+            <a:off x="5843016" y="3383280"/>
+            <a:ext cx="1133856" cy="621792"/>
           </a:xfrm>
           <a:prstGeom prst="rect">
             <a:avLst/>
@@ -5024,8 +6085,8 @@
         </p:nvSpPr>
         <p:spPr>
           <a:xfrm>
-            <a:off x="6062472" y="4096512"/>
-            <a:ext cx="1325880" cy="457200"/>
+            <a:off x="5843016" y="4096512"/>
+            <a:ext cx="1133856" cy="457200"/>
           </a:xfrm>
           <a:prstGeom prst="rect">
             <a:avLst/>
@@ -5063,8 +6124,8 @@
         </p:nvSpPr>
         <p:spPr>
           <a:xfrm>
-            <a:off x="7498080" y="3200400"/>
-            <a:ext cx="1325880" cy="1600200"/>
+            <a:off x="7068312" y="3200400"/>
+            <a:ext cx="1133856" cy="1600200"/>
           </a:xfrm>
           <a:prstGeom prst="rect">
             <a:avLst/>
@@ -5088,8 +6149,8 @@
         </p:nvSpPr>
         <p:spPr>
           <a:xfrm>
-            <a:off x="7498080" y="3383280"/>
-            <a:ext cx="1325880" cy="621792"/>
+            <a:off x="7068312" y="3383280"/>
+            <a:ext cx="1133856" cy="621792"/>
           </a:xfrm>
           <a:prstGeom prst="rect">
             <a:avLst/>
@@ -5124,8 +6185,8 @@
         </p:nvSpPr>
         <p:spPr>
           <a:xfrm>
-            <a:off x="7498080" y="4096512"/>
-            <a:ext cx="1325880" cy="457200"/>
+            <a:off x="7068312" y="4096512"/>
+            <a:ext cx="1133856" cy="457200"/>
           </a:xfrm>
           <a:prstGeom prst="rect">
             <a:avLst/>
@@ -5150,6 +6211,106 @@
                 <a:cs typeface="Calibri" pitchFamily="34" charset="-120"/>
               </a:rPr>
               <a:t>Utenti &amp; Ruoli</a:t>
+            </a:r>
+            <a:endParaRPr lang="en-US" sz="1100" dirty="0"/>
+          </a:p>
+        </p:txBody>
+      </p:sp>
+      <p:sp>
+        <p:nvSpPr>
+          <p:cNvPr id="40" name="Shape 29"/>
+          <p:cNvSpPr/>
+          <p:nvPr/>
+        </p:nvSpPr>
+        <p:spPr>
+          <a:xfrm>
+            <a:off x="4617720" y="3200400"/>
+            <a:ext cx="1133856" cy="1600200"/>
+          </a:xfrm>
+          <a:prstGeom prst="rect">
+            <a:avLst/>
+          </a:prstGeom>
+          <a:solidFill>
+            <a:srgbClr val="2D6A4F"/>
+          </a:solidFill>
+          <a:ln w="12700">
+            <a:solidFill>
+              <a:srgbClr val="40916C"/>
+            </a:solidFill>
+            <a:prstDash val="solid"/>
+          </a:ln>
+        </p:spPr>
+      </p:sp>
+      <p:sp>
+        <p:nvSpPr>
+          <p:cNvPr id="41" name="Text 30"/>
+          <p:cNvSpPr/>
+          <p:nvPr/>
+        </p:nvSpPr>
+        <p:spPr>
+          <a:xfrm>
+            <a:off x="4617720" y="3383280"/>
+            <a:ext cx="1133856" cy="621792"/>
+          </a:xfrm>
+          <a:prstGeom prst="rect">
+            <a:avLst/>
+          </a:prstGeom>
+          <a:noFill/>
+          <a:ln/>
+        </p:spPr>
+        <p:txBody>
+          <a:bodyPr wrap="square" rtlCol="0" anchor="ctr"/>
+          <a:lstStyle/>
+          <a:p>
+            <a:pPr algn="ctr" indent="0" marL="0">
+              <a:buNone/>
+            </a:pPr>
+            <a:r>
+              <a:rPr lang="en-US" sz="2800" dirty="0">
+                <a:solidFill>
+                  <a:srgbClr val="000000"/>
+                </a:solidFill>
+              </a:rPr>
+              <a:t>🤖</a:t>
+            </a:r>
+            <a:endParaRPr lang="en-US" sz="2800" dirty="0"/>
+          </a:p>
+        </p:txBody>
+      </p:sp>
+      <p:sp>
+        <p:nvSpPr>
+          <p:cNvPr id="42" name="Text 31"/>
+          <p:cNvSpPr/>
+          <p:nvPr/>
+        </p:nvSpPr>
+        <p:spPr>
+          <a:xfrm>
+            <a:off x="4617720" y="4096512"/>
+            <a:ext cx="1133856" cy="457200"/>
+          </a:xfrm>
+          <a:prstGeom prst="rect">
+            <a:avLst/>
+          </a:prstGeom>
+          <a:noFill/>
+          <a:ln/>
+        </p:spPr>
+        <p:txBody>
+          <a:bodyPr wrap="square" lIns="0" tIns="0" rIns="0" bIns="0" rtlCol="0" anchor="ctr"/>
+          <a:lstStyle/>
+          <a:p>
+            <a:pPr algn="ctr" indent="0" marL="0">
+              <a:buNone/>
+            </a:pPr>
+            <a:r>
+              <a:rPr lang="en-US" sz="1100" b="1" dirty="0">
+                <a:solidFill>
+                  <a:srgbClr val="FFFFFF"/>
+                </a:solidFill>
+                <a:latin typeface="Calibri" pitchFamily="34" charset="0"/>
+                <a:ea typeface="Calibri" pitchFamily="34" charset="-122"/>
+                <a:cs typeface="Calibri" pitchFamily="34" charset="-120"/>
+              </a:rPr>
+              <a:t>AI Wiki</a:t>
             </a:r>
             <a:endParaRPr lang="en-US" sz="1100" dirty="0"/>
           </a:p>
@@ -5163,7 +6324,7 @@
 </p:sld>
 </file>
 
-<file path=ppt/slides/slide13.xml><?xml version="1.0" encoding="utf-8"?>
+<file path=ppt/slides/slide14.xml><?xml version="1.0" encoding="utf-8"?>
 <p:sld xmlns:a="http://schemas.openxmlformats.org/drawingml/2006/main" xmlns:r="http://schemas.openxmlformats.org/officeDocument/2006/relationships" xmlns:p="http://schemas.openxmlformats.org/presentationml/2006/main">
   <p:cSld name="Slide 13">
     <p:bg>
@@ -6599,7 +7760,7 @@
                   <a:srgbClr val="000000"/>
                 </a:solidFill>
               </a:rPr>
-              <a:t>📑</a:t>
+              <a:t>🤖</a:t>
             </a:r>
             <a:endParaRPr lang="en-US" sz="1600" dirty="0"/>
           </a:p>
@@ -6638,7 +7799,7 @@
                 <a:ea typeface="Calibri" pitchFamily="34" charset="-122"/>
                 <a:cs typeface="Calibri" pitchFamily="34" charset="-120"/>
               </a:rPr>
-              <a:t>Reportistica</a:t>
+              <a:t>AI Wiki</a:t>
             </a:r>
             <a:endParaRPr lang="en-US" sz="1300" dirty="0"/>
           </a:p>
@@ -6655,7 +7816,7 @@
                 <a:ea typeface="Calibri" pitchFamily="34" charset="-122"/>
                 <a:cs typeface="Calibri" pitchFamily="34" charset="-120"/>
               </a:rPr>
-              <a:t>Relazione annuale e comunicazioni</a:t>
+              <a:t>Assistente intelligente sulla conoscenza aziendale</a:t>
             </a:r>
             <a:endParaRPr lang="en-US" sz="1300" dirty="0"/>
           </a:p>
@@ -6752,6 +7913,159 @@
                   <a:srgbClr val="000000"/>
                 </a:solidFill>
               </a:rPr>
+              <a:t>📑</a:t>
+            </a:r>
+            <a:endParaRPr lang="en-US" sz="1600" dirty="0"/>
+          </a:p>
+        </p:txBody>
+      </p:sp>
+      <p:sp>
+        <p:nvSpPr>
+          <p:cNvPr id="36" name="Text 34"/>
+          <p:cNvSpPr/>
+          <p:nvPr/>
+        </p:nvSpPr>
+        <p:spPr>
+          <a:xfrm>
+            <a:off x="5532120" y="2752344"/>
+            <a:ext cx="3090672" cy="420624"/>
+          </a:xfrm>
+          <a:prstGeom prst="rect">
+            <a:avLst/>
+          </a:prstGeom>
+          <a:noFill/>
+          <a:ln/>
+        </p:spPr>
+        <p:txBody>
+          <a:bodyPr wrap="square" lIns="0" tIns="0" rIns="0" bIns="0" rtlCol="0" anchor="ctr"/>
+          <a:lstStyle/>
+          <a:p>
+            <a:pPr indent="0" marL="0">
+              <a:buNone/>
+            </a:pPr>
+            <a:r>
+              <a:rPr lang="en-US" sz="1300" b="1" dirty="0">
+                <a:solidFill>
+                  <a:srgbClr val="1B4332"/>
+                </a:solidFill>
+                <a:latin typeface="Calibri" pitchFamily="34" charset="0"/>
+                <a:ea typeface="Calibri" pitchFamily="34" charset="-122"/>
+                <a:cs typeface="Calibri" pitchFamily="34" charset="-120"/>
+              </a:rPr>
+              <a:t>Reportistica</a:t>
+            </a:r>
+            <a:endParaRPr lang="en-US" sz="1300" dirty="0"/>
+          </a:p>
+          <a:p>
+            <a:pPr indent="0" marL="0">
+              <a:buNone/>
+            </a:pPr>
+            <a:r>
+              <a:rPr lang="en-US" sz="1100" dirty="0">
+                <a:solidFill>
+                  <a:srgbClr val="4A5568"/>
+                </a:solidFill>
+                <a:latin typeface="Calibri" pitchFamily="34" charset="0"/>
+                <a:ea typeface="Calibri" pitchFamily="34" charset="-122"/>
+                <a:cs typeface="Calibri" pitchFamily="34" charset="-120"/>
+              </a:rPr>
+              <a:t>Relazione annuale e comunicazioni</a:t>
+            </a:r>
+            <a:endParaRPr lang="en-US" sz="1300" dirty="0"/>
+          </a:p>
+        </p:txBody>
+      </p:sp>
+      <p:sp>
+        <p:nvSpPr>
+          <p:cNvPr id="37" name="Shape 27"/>
+          <p:cNvSpPr/>
+          <p:nvPr/>
+        </p:nvSpPr>
+        <p:spPr>
+          <a:xfrm>
+            <a:off x="457200" y="3319271"/>
+            <a:ext cx="329184" cy="329184"/>
+          </a:xfrm>
+          <a:prstGeom prst="ellipse">
+            <a:avLst/>
+          </a:prstGeom>
+          <a:solidFill>
+            <a:srgbClr val="40916C"/>
+          </a:solidFill>
+          <a:ln w="12700">
+            <a:solidFill>
+              <a:srgbClr val="40916C"/>
+            </a:solidFill>
+            <a:prstDash val="solid"/>
+          </a:ln>
+        </p:spPr>
+      </p:sp>
+      <p:sp>
+        <p:nvSpPr>
+          <p:cNvPr id="38" name="Text 28"/>
+          <p:cNvSpPr/>
+          <p:nvPr/>
+        </p:nvSpPr>
+        <p:spPr>
+          <a:xfrm>
+            <a:off x="457200" y="3319271"/>
+            <a:ext cx="329184" cy="329184"/>
+          </a:xfrm>
+          <a:prstGeom prst="rect">
+            <a:avLst/>
+          </a:prstGeom>
+          <a:noFill/>
+          <a:ln/>
+        </p:spPr>
+        <p:txBody>
+          <a:bodyPr wrap="square" lIns="0" tIns="0" rIns="0" bIns="0" rtlCol="0" anchor="ctr"/>
+          <a:lstStyle/>
+          <a:p>
+            <a:pPr algn="ctr" indent="0" marL="0">
+              <a:buNone/>
+            </a:pPr>
+            <a:r>
+              <a:rPr lang="en-US" sz="1200" b="1" dirty="0">
+                <a:solidFill>
+                  <a:srgbClr val="FFFFFF"/>
+                </a:solidFill>
+              </a:rPr>
+              <a:t>9</a:t>
+            </a:r>
+            <a:endParaRPr lang="en-US" sz="1200" dirty="0"/>
+          </a:p>
+        </p:txBody>
+      </p:sp>
+      <p:sp>
+        <p:nvSpPr>
+          <p:cNvPr id="39" name="Text 29"/>
+          <p:cNvSpPr/>
+          <p:nvPr/>
+        </p:nvSpPr>
+        <p:spPr>
+          <a:xfrm>
+            <a:off x="850392" y="3273551"/>
+            <a:ext cx="365760" cy="420624"/>
+          </a:xfrm>
+          <a:prstGeom prst="rect">
+            <a:avLst/>
+          </a:prstGeom>
+          <a:noFill/>
+          <a:ln/>
+        </p:spPr>
+        <p:txBody>
+          <a:bodyPr wrap="square" rtlCol="0" anchor="ctr"/>
+          <a:lstStyle/>
+          <a:p>
+            <a:pPr indent="0" marL="0">
+              <a:buNone/>
+            </a:pPr>
+            <a:r>
+              <a:rPr lang="en-US" sz="1600" dirty="0">
+                <a:solidFill>
+                  <a:srgbClr val="000000"/>
+                </a:solidFill>
+              </a:rPr>
               <a:t>🛡️</a:t>
             </a:r>
             <a:endParaRPr lang="en-US" sz="1600" dirty="0"/>
@@ -6760,13 +8074,13 @@
       </p:sp>
       <p:sp>
         <p:nvSpPr>
-          <p:cNvPr id="36" name="Text 34"/>
-          <p:cNvSpPr/>
-          <p:nvPr/>
-        </p:nvSpPr>
-        <p:spPr>
-          <a:xfrm>
-            <a:off x="5532120" y="2752344"/>
+          <p:cNvPr id="40" name="Text 30"/>
+          <p:cNvSpPr/>
+          <p:nvPr/>
+        </p:nvSpPr>
+        <p:spPr>
+          <a:xfrm>
+            <a:off x="1280160" y="3273551"/>
             <a:ext cx="3090672" cy="420624"/>
           </a:xfrm>
           <a:prstGeom prst="rect">
@@ -11686,29 +13000,15 @@
 </file>
 
 <file path=ppt/slides/slide9.xml><?xml version="1.0" encoding="utf-8"?>
-<p:sld xmlns:a="http://schemas.openxmlformats.org/drawingml/2006/main" xmlns:r="http://schemas.openxmlformats.org/officeDocument/2006/relationships" xmlns:p="http://schemas.openxmlformats.org/presentationml/2006/main">
-  <p:cSld name="Slide 9">
-    <p:bg>
-      <p:bgPr>
-        <a:solidFill>
-          <a:srgbClr val="FFFFFF"/>
-        </a:solidFill>
-      </p:bgPr>
-    </p:bg>
+<p:sld xmlns:a="http://schemas.openxmlformats.org/drawingml/2006/main" xmlns:p="http://schemas.openxmlformats.org/presentationml/2006/main" xmlns:r="http://schemas.openxmlformats.org/officeDocument/2006/relationships">
+  <p:cSld>
     <p:spTree>
       <p:nvGrpSpPr>
         <p:cNvPr id="1" name=""/>
         <p:cNvGrpSpPr/>
         <p:nvPr/>
       </p:nvGrpSpPr>
-      <p:grpSpPr>
-        <a:xfrm>
-          <a:off x="0" y="0"/>
-          <a:ext cx="0" cy="0"/>
-          <a:chOff x="0" y="0"/>
-          <a:chExt cx="0" cy="0"/>
-        </a:xfrm>
-      </p:grpSpPr>
+      <p:grpSpPr/>
       <p:sp>
         <p:nvSpPr>
           <p:cNvPr id="2" name="Shape 0"/>
@@ -11767,7 +13067,7 @@
                 <a:ea typeface="Georgia" pitchFamily="34" charset="-122"/>
                 <a:cs typeface="Georgia" pitchFamily="34" charset="-120"/>
               </a:rPr>
-              <a:t>Modulo: Reportistica</a:t>
+              <a:t>Modulo: AI Wiki</a:t>
             </a:r>
             <a:endParaRPr lang="en-US" sz="2600" dirty="0"/>
           </a:p>
@@ -11806,7 +13106,7 @@
                 <a:ea typeface="Calibri" pitchFamily="34" charset="-122"/>
                 <a:cs typeface="Calibri" pitchFamily="34" charset="-120"/>
               </a:rPr>
-              <a:t>Relazione annuale  •  Export  •  Comunicazioni</a:t>
+              <a:t>Conoscenza aziendale  •  Chat intelligente  •  Report automatici</a:t>
             </a:r>
             <a:endParaRPr lang="en-US" sz="1200" dirty="0"/>
           </a:p>
@@ -11821,165 +13121,7 @@
         <p:spPr>
           <a:xfrm>
             <a:off x="365760" y="1143000"/>
-            <a:ext cx="5029200" cy="2148840"/>
-          </a:xfrm>
-          <a:prstGeom prst="rect">
-            <a:avLst/>
-          </a:prstGeom>
-          <a:solidFill>
-            <a:srgbClr val="D8F3DC"/>
-          </a:solidFill>
-          <a:ln w="12700">
-            <a:solidFill>
-              <a:srgbClr val="A5D6A7"/>
-            </a:solidFill>
-            <a:prstDash val="solid"/>
-          </a:ln>
-        </p:spPr>
-      </p:sp>
-      <p:sp>
-        <p:nvSpPr>
-          <p:cNvPr id="6" name="Text 4"/>
-          <p:cNvSpPr/>
-          <p:nvPr/>
-        </p:nvSpPr>
-        <p:spPr>
-          <a:xfrm>
-            <a:off x="548640" y="1234440"/>
-            <a:ext cx="4663440" cy="438912"/>
-          </a:xfrm>
-          <a:prstGeom prst="rect">
-            <a:avLst/>
-          </a:prstGeom>
-          <a:noFill/>
-          <a:ln/>
-        </p:spPr>
-        <p:txBody>
-          <a:bodyPr wrap="square" lIns="0" tIns="0" rIns="0" bIns="0" rtlCol="0" anchor="ctr"/>
-          <a:lstStyle/>
-          <a:p>
-            <a:pPr indent="0" marL="0">
-              <a:buNone/>
-            </a:pPr>
-            <a:r>
-              <a:rPr lang="en-US" sz="1600" b="1" dirty="0">
-                <a:solidFill>
-                  <a:srgbClr val="1B4332"/>
-                </a:solidFill>
-                <a:latin typeface="Georgia" pitchFamily="34" charset="0"/>
-                <a:ea typeface="Georgia" pitchFamily="34" charset="-122"/>
-                <a:cs typeface="Georgia" pitchFamily="34" charset="-120"/>
-              </a:rPr>
-              <a:t>📑  Relazione Annuale AIA</a:t>
-            </a:r>
-            <a:endParaRPr lang="en-US" sz="1600" dirty="0"/>
-          </a:p>
-        </p:txBody>
-      </p:sp>
-      <p:sp>
-        <p:nvSpPr>
-          <p:cNvPr id="7" name="Text 5"/>
-          <p:cNvSpPr/>
-          <p:nvPr/>
-        </p:nvSpPr>
-        <p:spPr>
-          <a:xfrm>
-            <a:off x="548640" y="1737360"/>
-            <a:ext cx="4663440" cy="1417320"/>
-          </a:xfrm>
-          <a:prstGeom prst="rect">
-            <a:avLst/>
-          </a:prstGeom>
-          <a:noFill/>
-          <a:ln/>
-        </p:spPr>
-        <p:txBody>
-          <a:bodyPr wrap="square" rtlCol="0" anchor="ctr"/>
-          <a:lstStyle/>
-          <a:p>
-            <a:pPr marL="342900" indent="-342900">
-              <a:buSzPct val="100000"/>
-              <a:buChar char="•"/>
-            </a:pPr>
-            <a:r>
-              <a:rPr lang="en-US" sz="1200" dirty="0">
-                <a:solidFill>
-                  <a:srgbClr val="1B2028"/>
-                </a:solidFill>
-                <a:latin typeface="Calibri" pitchFamily="34" charset="0"/>
-                <a:ea typeface="Calibri" pitchFamily="34" charset="-122"/>
-                <a:cs typeface="Calibri" pitchFamily="34" charset="-120"/>
-              </a:rPr>
-              <a:t>Generazione automatica del documento annuale</a:t>
-            </a:r>
-            <a:endParaRPr lang="en-US" sz="1200" dirty="0"/>
-          </a:p>
-          <a:p>
-            <a:pPr marL="342900" indent="-342900">
-              <a:buSzPct val="100000"/>
-              <a:buChar char="•"/>
-            </a:pPr>
-            <a:r>
-              <a:rPr lang="en-US" sz="1200" dirty="0">
-                <a:solidFill>
-                  <a:srgbClr val="1B2028"/>
-                </a:solidFill>
-                <a:latin typeface="Calibri" pitchFamily="34" charset="0"/>
-                <a:ea typeface="Calibri" pitchFamily="34" charset="-122"/>
-                <a:cs typeface="Calibri" pitchFamily="34" charset="-120"/>
-              </a:rPr>
-              <a:t>Raccoglie tutti i dati inseriti nell'anno: produzione, monitoraggi, rifiuti</a:t>
-            </a:r>
-            <a:endParaRPr lang="en-US" sz="1200" dirty="0"/>
-          </a:p>
-          <a:p>
-            <a:pPr marL="342900" indent="-342900">
-              <a:buSzPct val="100000"/>
-              <a:buChar char="•"/>
-            </a:pPr>
-            <a:r>
-              <a:rPr lang="en-US" sz="1200" dirty="0">
-                <a:solidFill>
-                  <a:srgbClr val="1B2028"/>
-                </a:solidFill>
-                <a:latin typeface="Calibri" pitchFamily="34" charset="0"/>
-                <a:ea typeface="Calibri" pitchFamily="34" charset="-122"/>
-                <a:cs typeface="Calibri" pitchFamily="34" charset="-120"/>
-              </a:rPr>
-              <a:t>Esportazione PDF con un clic dalla dashboard</a:t>
-            </a:r>
-            <a:endParaRPr lang="en-US" sz="1200" dirty="0"/>
-          </a:p>
-          <a:p>
-            <a:pPr marL="342900" indent="-342900">
-              <a:buSzPct val="100000"/>
-              <a:buChar char="•"/>
-            </a:pPr>
-            <a:r>
-              <a:rPr lang="en-US" sz="1200" dirty="0">
-                <a:solidFill>
-                  <a:srgbClr val="1B2028"/>
-                </a:solidFill>
-                <a:latin typeface="Calibri" pitchFamily="34" charset="0"/>
-                <a:ea typeface="Calibri" pitchFamily="34" charset="-122"/>
-                <a:cs typeface="Calibri" pitchFamily="34" charset="-120"/>
-              </a:rPr>
-              <a:t>Selezionabile per stabilimento e anno di riferimento</a:t>
-            </a:r>
-            <a:endParaRPr lang="en-US" sz="1200" dirty="0"/>
-          </a:p>
-        </p:txBody>
-      </p:sp>
-      <p:sp>
-        <p:nvSpPr>
-          <p:cNvPr id="8" name="Shape 6"/>
-          <p:cNvSpPr/>
-          <p:nvPr/>
-        </p:nvSpPr>
-        <p:spPr>
-          <a:xfrm>
-            <a:off x="365760" y="3429000"/>
-            <a:ext cx="5029200" cy="1508760"/>
+            <a:ext cx="2651760" cy="3749040"/>
           </a:xfrm>
           <a:prstGeom prst="rect">
             <a:avLst/>
@@ -12004,24 +13146,24 @@
       </p:sp>
       <p:sp>
         <p:nvSpPr>
-          <p:cNvPr id="9" name="Shape 7"/>
-          <p:cNvSpPr/>
-          <p:nvPr/>
-        </p:nvSpPr>
-        <p:spPr>
-          <a:xfrm>
-            <a:off x="365760" y="3429000"/>
-            <a:ext cx="54864" cy="1508760"/>
+          <p:cNvPr id="6" name="Shape 4"/>
+          <p:cNvSpPr/>
+          <p:nvPr/>
+        </p:nvSpPr>
+        <p:spPr>
+          <a:xfrm>
+            <a:off x="365760" y="1143000"/>
+            <a:ext cx="2651760" cy="749808"/>
           </a:xfrm>
           <a:prstGeom prst="rect">
             <a:avLst/>
           </a:prstGeom>
           <a:solidFill>
-            <a:srgbClr val="40916C"/>
+            <a:srgbClr val="D8F3DC"/>
           </a:solidFill>
           <a:ln w="12700">
             <a:solidFill>
-              <a:srgbClr val="40916C"/>
+              <a:srgbClr val="C8E6C9"/>
             </a:solidFill>
             <a:prstDash val="solid"/>
           </a:ln>
@@ -12029,14 +13171,14 @@
       </p:sp>
       <p:sp>
         <p:nvSpPr>
-          <p:cNvPr id="10" name="Text 8"/>
-          <p:cNvSpPr/>
-          <p:nvPr/>
-        </p:nvSpPr>
-        <p:spPr>
-          <a:xfrm>
-            <a:off x="548640" y="3520440"/>
-            <a:ext cx="4663440" cy="384048"/>
+          <p:cNvPr id="7" name="Text 5"/>
+          <p:cNvSpPr/>
+          <p:nvPr/>
+        </p:nvSpPr>
+        <p:spPr>
+          <a:xfrm>
+            <a:off x="502920" y="1188720"/>
+            <a:ext cx="2395728" cy="658368"/>
           </a:xfrm>
           <a:prstGeom prst="rect">
             <a:avLst/>
@@ -12060,7 +13202,7 @@
                 <a:ea typeface="Georgia" pitchFamily="34" charset="-122"/>
                 <a:cs typeface="Georgia" pitchFamily="34" charset="-120"/>
               </a:rPr>
-              <a:t>📬  Comunicazioni verso gli enti</a:t>
+              <a:t>📚  Wiki della Conoscenza</a:t>
             </a:r>
             <a:endParaRPr lang="en-US" sz="1400" dirty="0"/>
           </a:p>
@@ -12068,53 +13210,108 @@
       </p:sp>
       <p:sp>
         <p:nvSpPr>
-          <p:cNvPr id="11" name="Text 9"/>
-          <p:cNvSpPr/>
-          <p:nvPr/>
-        </p:nvSpPr>
-        <p:spPr>
-          <a:xfrm>
-            <a:off x="548640" y="3950208"/>
-            <a:ext cx="4663440" cy="868680"/>
-          </a:xfrm>
-          <a:prstGeom prst="rect">
-            <a:avLst/>
-          </a:prstGeom>
-          <a:noFill/>
-          <a:ln/>
-        </p:spPr>
-        <p:txBody>
-          <a:bodyPr wrap="square" rtlCol="0" anchor="ctr"/>
-          <a:lstStyle/>
-          <a:p>
-            <a:pPr indent="0" marL="0">
-              <a:buNone/>
+          <p:cNvPr id="8" name="Text 6"/>
+          <p:cNvSpPr/>
+          <p:nvPr/>
+        </p:nvSpPr>
+        <p:spPr>
+          <a:xfrm>
+            <a:off x="502920" y="1993392"/>
+            <a:ext cx="2423160" cy="2834640"/>
+          </a:xfrm>
+          <a:prstGeom prst="rect">
+            <a:avLst/>
+          </a:prstGeom>
+          <a:noFill/>
+          <a:ln/>
+        </p:spPr>
+        <p:txBody>
+          <a:bodyPr wrap="square" rtlCol="0" anchor="t"/>
+          <a:lstStyle/>
+          <a:p>
+            <a:pPr marL="342900" indent="-342900">
+              <a:buSzPct val="100000"/>
+              <a:buChar char="•"/>
             </a:pPr>
             <a:r>
               <a:rPr lang="en-US" sz="1200" dirty="0">
                 <a:solidFill>
-                  <a:srgbClr val="4A5568"/>
-                </a:solidFill>
-                <a:latin typeface="Calibri" pitchFamily="34" charset="0"/>
-                <a:ea typeface="Calibri" pitchFamily="34" charset="-122"/>
-                <a:cs typeface="Calibri" pitchFamily="34" charset="-120"/>
-              </a:rPr>
-              <a:t>Archiviazione di tutte le comunicazioni ufficiali verso ARPA, Provincia e Regione con data, oggetto e allegato. Storico completo per ogni stabilimento.</a:t>
+                  <a:srgbClr val="1B2028"/>
+                </a:solidFill>
+                <a:latin typeface="Calibri" pitchFamily="34" charset="0"/>
+                <a:ea typeface="Calibri" pitchFamily="34" charset="-122"/>
+                <a:cs typeface="Calibri" pitchFamily="34" charset="-120"/>
+              </a:rPr>
+              <a:t>Pagine generate automaticamente da documenti, prescrizioni, scadenze e dati ambientali</a:t>
             </a:r>
             <a:endParaRPr lang="en-US" sz="1200" dirty="0"/>
           </a:p>
-        </p:txBody>
-      </p:sp>
-      <p:sp>
-        <p:nvSpPr>
-          <p:cNvPr id="12" name="Shape 10"/>
-          <p:cNvSpPr/>
-          <p:nvPr/>
-        </p:nvSpPr>
-        <p:spPr>
-          <a:xfrm>
-            <a:off x="5669280" y="1143000"/>
-            <a:ext cx="3017520" cy="1143000"/>
+          <a:p>
+            <a:pPr marL="342900" indent="-342900">
+              <a:buSzPct val="100000"/>
+              <a:buChar char="•"/>
+            </a:pPr>
+            <a:r>
+              <a:rPr lang="en-US" sz="1200" dirty="0">
+                <a:solidFill>
+                  <a:srgbClr val="1B2028"/>
+                </a:solidFill>
+                <a:latin typeface="Calibri" pitchFamily="34" charset="0"/>
+                <a:ea typeface="Calibri" pitchFamily="34" charset="-122"/>
+                <a:cs typeface="Calibri" pitchFamily="34" charset="-120"/>
+              </a:rPr>
+              <a:t>Collegate in un grafo di conoscenza navigabile</a:t>
+            </a:r>
+            <a:endParaRPr lang="en-US" sz="1200" dirty="0"/>
+          </a:p>
+          <a:p>
+            <a:pPr marL="342900" indent="-342900">
+              <a:buSzPct val="100000"/>
+              <a:buChar char="•"/>
+            </a:pPr>
+            <a:r>
+              <a:rPr lang="en-US" sz="1200" dirty="0">
+                <a:solidFill>
+                  <a:srgbClr val="1B2028"/>
+                </a:solidFill>
+                <a:latin typeface="Calibri" pitchFamily="34" charset="0"/>
+                <a:ea typeface="Calibri" pitchFamily="34" charset="-122"/>
+                <a:cs typeface="Calibri" pitchFamily="34" charset="-120"/>
+              </a:rPr>
+              <a:t>Aggiornamento automatico ad ogni nuovo documento</a:t>
+            </a:r>
+            <a:endParaRPr lang="en-US" sz="1200" dirty="0"/>
+          </a:p>
+          <a:p>
+            <a:pPr marL="342900" indent="-342900">
+              <a:buSzPct val="100000"/>
+              <a:buChar char="•"/>
+            </a:pPr>
+            <a:r>
+              <a:rPr lang="en-US" sz="1200" dirty="0">
+                <a:solidFill>
+                  <a:srgbClr val="1B2028"/>
+                </a:solidFill>
+                <a:latin typeface="Calibri" pitchFamily="34" charset="0"/>
+                <a:ea typeface="Calibri" pitchFamily="34" charset="-122"/>
+                <a:cs typeface="Calibri" pitchFamily="34" charset="-120"/>
+              </a:rPr>
+              <a:t>Fonti sempre tracciabili e verificabili</a:t>
+            </a:r>
+            <a:endParaRPr lang="en-US" sz="1200" dirty="0"/>
+          </a:p>
+        </p:txBody>
+      </p:sp>
+      <p:sp>
+        <p:nvSpPr>
+          <p:cNvPr id="9" name="Shape 7"/>
+          <p:cNvSpPr/>
+          <p:nvPr/>
+        </p:nvSpPr>
+        <p:spPr>
+          <a:xfrm>
+            <a:off x="3200400" y="1143000"/>
+            <a:ext cx="2651760" cy="3749040"/>
           </a:xfrm>
           <a:prstGeom prst="rect">
             <a:avLst/>
@@ -12139,24 +13336,24 @@
       </p:sp>
       <p:sp>
         <p:nvSpPr>
-          <p:cNvPr id="13" name="Shape 11"/>
-          <p:cNvSpPr/>
-          <p:nvPr/>
-        </p:nvSpPr>
-        <p:spPr>
-          <a:xfrm>
-            <a:off x="5669280" y="1143000"/>
-            <a:ext cx="54864" cy="1143000"/>
+          <p:cNvPr id="10" name="Shape 8"/>
+          <p:cNvSpPr/>
+          <p:nvPr/>
+        </p:nvSpPr>
+        <p:spPr>
+          <a:xfrm>
+            <a:off x="3200400" y="1143000"/>
+            <a:ext cx="2651760" cy="749808"/>
           </a:xfrm>
           <a:prstGeom prst="rect">
             <a:avLst/>
           </a:prstGeom>
           <a:solidFill>
-            <a:srgbClr val="40916C"/>
+            <a:srgbClr val="D8F3DC"/>
           </a:solidFill>
           <a:ln w="12700">
             <a:solidFill>
-              <a:srgbClr val="40916C"/>
+              <a:srgbClr val="C8E6C9"/>
             </a:solidFill>
             <a:prstDash val="solid"/>
           </a:ln>
@@ -12164,50 +13361,14 @@
       </p:sp>
       <p:sp>
         <p:nvSpPr>
-          <p:cNvPr id="14" name="Text 12"/>
-          <p:cNvSpPr/>
-          <p:nvPr/>
-        </p:nvSpPr>
-        <p:spPr>
-          <a:xfrm>
-            <a:off x="5760720" y="1143000"/>
-            <a:ext cx="548640" cy="1143000"/>
-          </a:xfrm>
-          <a:prstGeom prst="rect">
-            <a:avLst/>
-          </a:prstGeom>
-          <a:noFill/>
-          <a:ln/>
-        </p:spPr>
-        <p:txBody>
-          <a:bodyPr wrap="square" rtlCol="0" anchor="ctr"/>
-          <a:lstStyle/>
-          <a:p>
-            <a:pPr algn="ctr" indent="0" marL="0">
-              <a:buNone/>
-            </a:pPr>
-            <a:r>
-              <a:rPr lang="en-US" sz="2400" dirty="0">
-                <a:solidFill>
-                  <a:srgbClr val="000000"/>
-                </a:solidFill>
-              </a:rPr>
-              <a:t>📊</a:t>
-            </a:r>
-            <a:endParaRPr lang="en-US" sz="2400" dirty="0"/>
-          </a:p>
-        </p:txBody>
-      </p:sp>
-      <p:sp>
-        <p:nvSpPr>
-          <p:cNvPr id="15" name="Text 13"/>
-          <p:cNvSpPr/>
-          <p:nvPr/>
-        </p:nvSpPr>
-        <p:spPr>
-          <a:xfrm>
-            <a:off x="6355080" y="1280160"/>
-            <a:ext cx="2240280" cy="868680"/>
+          <p:cNvPr id="11" name="Text 9"/>
+          <p:cNvSpPr/>
+          <p:nvPr/>
+        </p:nvSpPr>
+        <p:spPr>
+          <a:xfrm>
+            <a:off x="3337560" y="1188720"/>
+            <a:ext cx="2395728" cy="658368"/>
           </a:xfrm>
           <a:prstGeom prst="rect">
             <a:avLst/>
@@ -12223,47 +13384,124 @@
               <a:buNone/>
             </a:pPr>
             <a:r>
-              <a:rPr lang="en-US" sz="1300" b="1" dirty="0">
+              <a:rPr lang="en-US" sz="1400" b="1" dirty="0">
                 <a:solidFill>
                   <a:srgbClr val="1B4332"/>
                 </a:solidFill>
-                <a:latin typeface="Calibri" pitchFamily="34" charset="0"/>
-                <a:ea typeface="Calibri" pitchFamily="34" charset="-122"/>
-                <a:cs typeface="Calibri" pitchFamily="34" charset="-120"/>
-              </a:rPr>
-              <a:t>Export Excel</a:t>
-            </a:r>
-            <a:endParaRPr lang="en-US" sz="1300" dirty="0"/>
-          </a:p>
-          <a:p>
-            <a:pPr indent="0" marL="0">
-              <a:buNone/>
-            </a:pPr>
-            <a:r>
-              <a:rPr lang="en-US" sz="1100" dirty="0">
-                <a:solidFill>
-                  <a:srgbClr val="4A5568"/>
-                </a:solidFill>
-                <a:latin typeface="Calibri" pitchFamily="34" charset="0"/>
-                <a:ea typeface="Calibri" pitchFamily="34" charset="-122"/>
-                <a:cs typeface="Calibri" pitchFamily="34" charset="-120"/>
-              </a:rPr>
-              <a:t>Export dati tabellari per prescrizioni, misure e scadenze in formato .xlsx.</a:t>
-            </a:r>
-            <a:endParaRPr lang="en-US" sz="1300" dirty="0"/>
-          </a:p>
-        </p:txBody>
-      </p:sp>
-      <p:sp>
-        <p:nvSpPr>
-          <p:cNvPr id="16" name="Shape 14"/>
-          <p:cNvSpPr/>
-          <p:nvPr/>
-        </p:nvSpPr>
-        <p:spPr>
-          <a:xfrm>
-            <a:off x="5669280" y="2441448"/>
-            <a:ext cx="3017520" cy="1143000"/>
+                <a:latin typeface="Georgia" pitchFamily="34" charset="0"/>
+                <a:ea typeface="Georgia" pitchFamily="34" charset="-122"/>
+                <a:cs typeface="Georgia" pitchFamily="34" charset="-120"/>
+              </a:rPr>
+              <a:t>💬  Chat sui propri dati</a:t>
+            </a:r>
+            <a:endParaRPr lang="en-US" sz="1400" dirty="0"/>
+          </a:p>
+        </p:txBody>
+      </p:sp>
+      <p:sp>
+        <p:nvSpPr>
+          <p:cNvPr id="12" name="Text 10"/>
+          <p:cNvSpPr/>
+          <p:nvPr/>
+        </p:nvSpPr>
+        <p:spPr>
+          <a:xfrm>
+            <a:off x="3337560" y="1993392"/>
+            <a:ext cx="2423160" cy="2834640"/>
+          </a:xfrm>
+          <a:prstGeom prst="rect">
+            <a:avLst/>
+          </a:prstGeom>
+          <a:noFill/>
+          <a:ln/>
+        </p:spPr>
+        <p:txBody>
+          <a:bodyPr wrap="square" rtlCol="0" anchor="t"/>
+          <a:lstStyle/>
+          <a:p>
+            <a:pPr marL="342900" indent="-342900">
+              <a:buSzPct val="100000"/>
+              <a:buChar char="•"/>
+            </a:pPr>
+            <a:r>
+              <a:rPr lang="en-US" sz="1200" dirty="0">
+                <a:solidFill>
+                  <a:srgbClr val="1B2028"/>
+                </a:solidFill>
+                <a:latin typeface="Calibri" pitchFamily="34" charset="0"/>
+                <a:ea typeface="Calibri" pitchFamily="34" charset="-122"/>
+                <a:cs typeface="Calibri" pitchFamily="34" charset="-120"/>
+              </a:rPr>
+              <a:t>Domande in linguaggio naturale: "quali prescrizioni scadono questo mese?"</a:t>
+            </a:r>
+            <a:endParaRPr lang="en-US" sz="1200" dirty="0"/>
+          </a:p>
+          <a:p>
+            <a:pPr marL="342900" indent="-342900">
+              <a:buSzPct val="100000"/>
+              <a:buChar char="•"/>
+            </a:pPr>
+            <a:r>
+              <a:rPr lang="en-US" sz="1200" dirty="0">
+                <a:solidFill>
+                  <a:srgbClr val="1B2028"/>
+                </a:solidFill>
+                <a:latin typeface="Calibri" pitchFamily="34" charset="0"/>
+                <a:ea typeface="Calibri" pitchFamily="34" charset="-122"/>
+                <a:cs typeface="Calibri" pitchFamily="34" charset="-120"/>
+              </a:rPr>
+              <a:t>Risposte basate esclusivamente sui dati aziendali</a:t>
+            </a:r>
+            <a:endParaRPr lang="en-US" sz="1200" dirty="0"/>
+          </a:p>
+          <a:p>
+            <a:pPr marL="342900" indent="-342900">
+              <a:buSzPct val="100000"/>
+              <a:buChar char="•"/>
+            </a:pPr>
+            <a:r>
+              <a:rPr lang="en-US" sz="1200" dirty="0">
+                <a:solidFill>
+                  <a:srgbClr val="1B2028"/>
+                </a:solidFill>
+                <a:latin typeface="Calibri" pitchFamily="34" charset="0"/>
+                <a:ea typeface="Calibri" pitchFamily="34" charset="-122"/>
+                <a:cs typeface="Calibri" pitchFamily="34" charset="-120"/>
+              </a:rPr>
+              <a:t>Fonti citate in ogni risposta</a:t>
+            </a:r>
+            <a:endParaRPr lang="en-US" sz="1200" dirty="0"/>
+          </a:p>
+          <a:p>
+            <a:pPr marL="342900" indent="-342900">
+              <a:buSzPct val="100000"/>
+              <a:buChar char="•"/>
+            </a:pPr>
+            <a:r>
+              <a:rPr lang="en-US" sz="1200" dirty="0">
+                <a:solidFill>
+                  <a:srgbClr val="1B2028"/>
+                </a:solidFill>
+                <a:latin typeface="Calibri" pitchFamily="34" charset="0"/>
+                <a:ea typeface="Calibri" pitchFamily="34" charset="-122"/>
+                <a:cs typeface="Calibri" pitchFamily="34" charset="-120"/>
+              </a:rPr>
+              <a:t>Ricerca mirata per tag e stabilimento</a:t>
+            </a:r>
+            <a:endParaRPr lang="en-US" sz="1200" dirty="0"/>
+          </a:p>
+        </p:txBody>
+      </p:sp>
+      <p:sp>
+        <p:nvSpPr>
+          <p:cNvPr id="13" name="Shape 11"/>
+          <p:cNvSpPr/>
+          <p:nvPr/>
+        </p:nvSpPr>
+        <p:spPr>
+          <a:xfrm>
+            <a:off x="6035040" y="1143000"/>
+            <a:ext cx="2651760" cy="3749040"/>
           </a:xfrm>
           <a:prstGeom prst="rect">
             <a:avLst/>
@@ -12288,24 +13526,24 @@
       </p:sp>
       <p:sp>
         <p:nvSpPr>
-          <p:cNvPr id="17" name="Shape 15"/>
-          <p:cNvSpPr/>
-          <p:nvPr/>
-        </p:nvSpPr>
-        <p:spPr>
-          <a:xfrm>
-            <a:off x="5669280" y="2441448"/>
-            <a:ext cx="54864" cy="1143000"/>
+          <p:cNvPr id="14" name="Shape 12"/>
+          <p:cNvSpPr/>
+          <p:nvPr/>
+        </p:nvSpPr>
+        <p:spPr>
+          <a:xfrm>
+            <a:off x="6035040" y="1143000"/>
+            <a:ext cx="2651760" cy="749808"/>
           </a:xfrm>
           <a:prstGeom prst="rect">
             <a:avLst/>
           </a:prstGeom>
           <a:solidFill>
-            <a:srgbClr val="40916C"/>
+            <a:srgbClr val="D8F3DC"/>
           </a:solidFill>
           <a:ln w="12700">
             <a:solidFill>
-              <a:srgbClr val="40916C"/>
+              <a:srgbClr val="C8E6C9"/>
             </a:solidFill>
             <a:prstDash val="solid"/>
           </a:ln>
@@ -12313,50 +13551,14 @@
       </p:sp>
       <p:sp>
         <p:nvSpPr>
-          <p:cNvPr id="18" name="Text 16"/>
-          <p:cNvSpPr/>
-          <p:nvPr/>
-        </p:nvSpPr>
-        <p:spPr>
-          <a:xfrm>
-            <a:off x="5760720" y="2441448"/>
-            <a:ext cx="548640" cy="1143000"/>
-          </a:xfrm>
-          <a:prstGeom prst="rect">
-            <a:avLst/>
-          </a:prstGeom>
-          <a:noFill/>
-          <a:ln/>
-        </p:spPr>
-        <p:txBody>
-          <a:bodyPr wrap="square" rtlCol="0" anchor="ctr"/>
-          <a:lstStyle/>
-          <a:p>
-            <a:pPr algn="ctr" indent="0" marL="0">
-              <a:buNone/>
-            </a:pPr>
-            <a:r>
-              <a:rPr lang="en-US" sz="2400" dirty="0">
-                <a:solidFill>
-                  <a:srgbClr val="000000"/>
-                </a:solidFill>
-              </a:rPr>
-              <a:t>📥</a:t>
-            </a:r>
-            <a:endParaRPr lang="en-US" sz="2400" dirty="0"/>
-          </a:p>
-        </p:txBody>
-      </p:sp>
-      <p:sp>
-        <p:nvSpPr>
-          <p:cNvPr id="19" name="Text 17"/>
-          <p:cNvSpPr/>
-          <p:nvPr/>
-        </p:nvSpPr>
-        <p:spPr>
-          <a:xfrm>
-            <a:off x="6355080" y="2578608"/>
-            <a:ext cx="2240280" cy="868680"/>
+          <p:cNvPr id="15" name="Text 13"/>
+          <p:cNvSpPr/>
+          <p:nvPr/>
+        </p:nvSpPr>
+        <p:spPr>
+          <a:xfrm>
+            <a:off x="6172200" y="1188720"/>
+            <a:ext cx="2395728" cy="658368"/>
           </a:xfrm>
           <a:prstGeom prst="rect">
             <a:avLst/>
@@ -12372,183 +13574,111 @@
               <a:buNone/>
             </a:pPr>
             <a:r>
-              <a:rPr lang="en-US" sz="1300" b="1" dirty="0">
+              <a:rPr lang="en-US" sz="1400" b="1" dirty="0">
                 <a:solidFill>
                   <a:srgbClr val="1B4332"/>
                 </a:solidFill>
-                <a:latin typeface="Calibri" pitchFamily="34" charset="0"/>
-                <a:ea typeface="Calibri" pitchFamily="34" charset="-122"/>
-                <a:cs typeface="Calibri" pitchFamily="34" charset="-120"/>
-              </a:rPr>
-              <a:t>Download immediato</a:t>
-            </a:r>
-            <a:endParaRPr lang="en-US" sz="1300" dirty="0"/>
-          </a:p>
-          <a:p>
-            <a:pPr indent="0" marL="0">
-              <a:buNone/>
-            </a:pPr>
-            <a:r>
-              <a:rPr lang="en-US" sz="1100" dirty="0">
-                <a:solidFill>
-                  <a:srgbClr val="4A5568"/>
-                </a:solidFill>
-                <a:latin typeface="Calibri" pitchFamily="34" charset="0"/>
-                <a:ea typeface="Calibri" pitchFamily="34" charset="-122"/>
-                <a:cs typeface="Calibri" pitchFamily="34" charset="-120"/>
-              </a:rPr>
-              <a:t>Tutti i report disponibili per il download diretto senza attese.</a:t>
-            </a:r>
-            <a:endParaRPr lang="en-US" sz="1300" dirty="0"/>
-          </a:p>
-        </p:txBody>
-      </p:sp>
-      <p:sp>
-        <p:nvSpPr>
-          <p:cNvPr id="20" name="Shape 18"/>
-          <p:cNvSpPr/>
-          <p:nvPr/>
-        </p:nvSpPr>
-        <p:spPr>
-          <a:xfrm>
-            <a:off x="5669280" y="3739896"/>
-            <a:ext cx="3017520" cy="1143000"/>
-          </a:xfrm>
-          <a:prstGeom prst="rect">
-            <a:avLst/>
-          </a:prstGeom>
-          <a:solidFill>
-            <a:srgbClr val="FFFFFF"/>
-          </a:solidFill>
-          <a:ln w="12700">
-            <a:solidFill>
-              <a:srgbClr val="E8F5E9"/>
-            </a:solidFill>
-            <a:prstDash val="solid"/>
-          </a:ln>
-          <a:effectLst>
-            <a:outerShdw sx="100000" sy="100000" kx="0" ky="0" algn="bl" rotWithShape="0" blurRad="63500" dist="25400" dir="8100000">
-              <a:srgbClr val="000000">
-                <a:alpha val="10000"/>
-              </a:srgbClr>
-            </a:outerShdw>
-          </a:effectLst>
-        </p:spPr>
-      </p:sp>
-      <p:sp>
-        <p:nvSpPr>
-          <p:cNvPr id="21" name="Shape 19"/>
-          <p:cNvSpPr/>
-          <p:nvPr/>
-        </p:nvSpPr>
-        <p:spPr>
-          <a:xfrm>
-            <a:off x="5669280" y="3739896"/>
-            <a:ext cx="54864" cy="1143000"/>
-          </a:xfrm>
-          <a:prstGeom prst="rect">
-            <a:avLst/>
-          </a:prstGeom>
-          <a:solidFill>
-            <a:srgbClr val="40916C"/>
-          </a:solidFill>
-          <a:ln w="12700">
-            <a:solidFill>
-              <a:srgbClr val="40916C"/>
-            </a:solidFill>
-            <a:prstDash val="solid"/>
-          </a:ln>
-        </p:spPr>
-      </p:sp>
-      <p:sp>
-        <p:nvSpPr>
-          <p:cNvPr id="22" name="Text 20"/>
-          <p:cNvSpPr/>
-          <p:nvPr/>
-        </p:nvSpPr>
-        <p:spPr>
-          <a:xfrm>
-            <a:off x="5760720" y="3739896"/>
-            <a:ext cx="548640" cy="1143000"/>
-          </a:xfrm>
-          <a:prstGeom prst="rect">
-            <a:avLst/>
-          </a:prstGeom>
-          <a:noFill/>
-          <a:ln/>
-        </p:spPr>
-        <p:txBody>
-          <a:bodyPr wrap="square" rtlCol="0" anchor="ctr"/>
-          <a:lstStyle/>
-          <a:p>
-            <a:pPr algn="ctr" indent="0" marL="0">
-              <a:buNone/>
-            </a:pPr>
-            <a:r>
-              <a:rPr lang="en-US" sz="2400" dirty="0">
-                <a:solidFill>
-                  <a:srgbClr val="000000"/>
-                </a:solidFill>
-              </a:rPr>
-              <a:t>📋</a:t>
-            </a:r>
-            <a:endParaRPr lang="en-US" sz="2400" dirty="0"/>
-          </a:p>
-        </p:txBody>
-      </p:sp>
-      <p:sp>
-        <p:nvSpPr>
-          <p:cNvPr id="23" name="Text 21"/>
-          <p:cNvSpPr/>
-          <p:nvPr/>
-        </p:nvSpPr>
-        <p:spPr>
-          <a:xfrm>
-            <a:off x="6355080" y="3877056"/>
-            <a:ext cx="2240280" cy="868680"/>
-          </a:xfrm>
-          <a:prstGeom prst="rect">
-            <a:avLst/>
-          </a:prstGeom>
-          <a:noFill/>
-          <a:ln/>
-        </p:spPr>
-        <p:txBody>
-          <a:bodyPr wrap="square" lIns="0" tIns="0" rIns="0" bIns="0" rtlCol="0" anchor="ctr"/>
-          <a:lstStyle/>
-          <a:p>
-            <a:pPr indent="0" marL="0">
-              <a:buNone/>
-            </a:pPr>
-            <a:r>
-              <a:rPr lang="en-US" sz="1300" b="1" dirty="0">
-                <a:solidFill>
-                  <a:srgbClr val="1B4332"/>
-                </a:solidFill>
-                <a:latin typeface="Calibri" pitchFamily="34" charset="0"/>
-                <a:ea typeface="Calibri" pitchFamily="34" charset="-122"/>
-                <a:cs typeface="Calibri" pitchFamily="34" charset="-120"/>
-              </a:rPr>
-              <a:t>Storico completo</a:t>
-            </a:r>
-            <a:endParaRPr lang="en-US" sz="1300" dirty="0"/>
-          </a:p>
-          <a:p>
-            <a:pPr indent="0" marL="0">
-              <a:buNone/>
-            </a:pPr>
-            <a:r>
-              <a:rPr lang="en-US" sz="1100" dirty="0">
-                <a:solidFill>
-                  <a:srgbClr val="4A5568"/>
-                </a:solidFill>
-                <a:latin typeface="Calibri" pitchFamily="34" charset="0"/>
-                <a:ea typeface="Calibri" pitchFamily="34" charset="-122"/>
-                <a:cs typeface="Calibri" pitchFamily="34" charset="-120"/>
-              </a:rPr>
-              <a:t>Dati storici per anno e stabilimento sempre consultabili.</a:t>
-            </a:r>
-            <a:endParaRPr lang="en-US" sz="1300" dirty="0"/>
+                <a:latin typeface="Georgia" pitchFamily="34" charset="0"/>
+                <a:ea typeface="Georgia" pitchFamily="34" charset="-122"/>
+                <a:cs typeface="Georgia" pitchFamily="34" charset="-120"/>
+              </a:rPr>
+              <a:t>🤖  Assistente intelligente</a:t>
+            </a:r>
+            <a:endParaRPr lang="en-US" sz="1400" dirty="0"/>
+          </a:p>
+        </p:txBody>
+      </p:sp>
+      <p:sp>
+        <p:nvSpPr>
+          <p:cNvPr id="16" name="Text 14"/>
+          <p:cNvSpPr/>
+          <p:nvPr/>
+        </p:nvSpPr>
+        <p:spPr>
+          <a:xfrm>
+            <a:off x="6172200" y="1993392"/>
+            <a:ext cx="2423160" cy="2834640"/>
+          </a:xfrm>
+          <a:prstGeom prst="rect">
+            <a:avLst/>
+          </a:prstGeom>
+          <a:noFill/>
+          <a:ln/>
+        </p:spPr>
+        <p:txBody>
+          <a:bodyPr wrap="square" rtlCol="0" anchor="t"/>
+          <a:lstStyle/>
+          <a:p>
+            <a:pPr marL="342900" indent="-342900">
+              <a:buSzPct val="100000"/>
+              <a:buChar char="•"/>
+            </a:pPr>
+            <a:r>
+              <a:rPr lang="en-US" sz="1200" dirty="0">
+                <a:solidFill>
+                  <a:srgbClr val="1B2028"/>
+                </a:solidFill>
+                <a:latin typeface="Calibri" pitchFamily="34" charset="0"/>
+                <a:ea typeface="Calibri" pitchFamily="34" charset="-122"/>
+                <a:cs typeface="Calibri" pitchFamily="34" charset="-120"/>
+              </a:rPr>
+              <a:t>Genera grafici e previsioni sugli andamenti</a:t>
+            </a:r>
+            <a:endParaRPr lang="en-US" sz="1200" dirty="0"/>
+          </a:p>
+          <a:p>
+            <a:pPr marL="342900" indent="-342900">
+              <a:buSzPct val="100000"/>
+              <a:buChar char="•"/>
+            </a:pPr>
+            <a:r>
+              <a:rPr lang="en-US" sz="1200" dirty="0">
+                <a:solidFill>
+                  <a:srgbClr val="1B2028"/>
+                </a:solidFill>
+                <a:latin typeface="Calibri" pitchFamily="34" charset="0"/>
+                <a:ea typeface="Calibri" pitchFamily="34" charset="-122"/>
+                <a:cs typeface="Calibri" pitchFamily="34" charset="-120"/>
+              </a:rPr>
+              <a:t>Bozze di report Word e presentazioni pronte da scaricare</a:t>
+            </a:r>
+            <a:endParaRPr lang="en-US" sz="1200" dirty="0"/>
+          </a:p>
+          <a:p>
+            <a:pPr marL="342900" indent="-342900">
+              <a:buSzPct val="100000"/>
+              <a:buChar char="•"/>
+            </a:pPr>
+            <a:r>
+              <a:rPr lang="en-US" sz="1200" dirty="0">
+                <a:solidFill>
+                  <a:srgbClr val="1B2028"/>
+                </a:solidFill>
+                <a:latin typeface="Calibri" pitchFamily="34" charset="0"/>
+                <a:ea typeface="Calibri" pitchFamily="34" charset="-122"/>
+                <a:cs typeface="Calibri" pitchFamily="34" charset="-120"/>
+              </a:rPr>
+              <a:t>I dati restano nel database aziendale</a:t>
+            </a:r>
+            <a:endParaRPr lang="en-US" sz="1200" dirty="0"/>
+          </a:p>
+          <a:p>
+            <a:pPr marL="342900" indent="-342900">
+              <a:buSzPct val="100000"/>
+              <a:buChar char="•"/>
+            </a:pPr>
+            <a:r>
+              <a:rPr lang="en-US" sz="1200" dirty="0">
+                <a:solidFill>
+                  <a:srgbClr val="1B2028"/>
+                </a:solidFill>
+                <a:latin typeface="Calibri" pitchFamily="34" charset="0"/>
+                <a:ea typeface="Calibri" pitchFamily="34" charset="-122"/>
+                <a:cs typeface="Calibri" pitchFamily="34" charset="-120"/>
+              </a:rPr>
+              <a:t>Possibilità di AI on-premise</a:t>
+            </a:r>
+            <a:endParaRPr lang="en-US" sz="1200" dirty="0"/>
           </a:p>
         </p:txBody>
       </p:sp>
